--- a/사주교육_3회차.pptx
+++ b/사주교육_3회차.pptx
@@ -694,9 +694,9 @@
                 <a:solidFill>
                   <a:srgbClr val="FFFFFF"/>
                 </a:solidFill>
-                <a:latin typeface="paybooc OTF" pitchFamily="34" charset="0"/>
-                <a:ea typeface="paybooc OTF" pitchFamily="34" charset="-122"/>
-                <a:cs typeface="paybooc OTF" pitchFamily="34" charset="-120"/>
+                <a:latin typeface="Pretendard Light" pitchFamily="34" charset="0"/>
+                <a:ea typeface="Pretendard Light" pitchFamily="34" charset="-122"/>
+                <a:cs typeface="Pretendard Light" pitchFamily="34" charset="-120"/>
               </a:rPr>
               <a:t>수수 사주교육</a:t>
             </a:r>
@@ -732,9 +732,9 @@
                 <a:solidFill>
                   <a:srgbClr val="A7E5D3"/>
                 </a:solidFill>
-                <a:latin typeface="paybooc OTF" pitchFamily="34" charset="0"/>
-                <a:ea typeface="paybooc OTF" pitchFamily="34" charset="-122"/>
-                <a:cs typeface="paybooc OTF" pitchFamily="34" charset="-120"/>
+                <a:latin typeface="Pretendard Light" pitchFamily="34" charset="0"/>
+                <a:ea typeface="Pretendard Light" pitchFamily="34" charset="-122"/>
+                <a:cs typeface="Pretendard Light" pitchFamily="34" charset="-120"/>
               </a:rPr>
               <a:t>SAJU TEACHER COURSE · SESSION 03</a:t>
             </a:r>
@@ -830,9 +830,9 @@
                 <a:solidFill>
                   <a:srgbClr val="A8A29E"/>
                 </a:solidFill>
-                <a:latin typeface="paybooc OTF" pitchFamily="34" charset="0"/>
-                <a:ea typeface="paybooc OTF" pitchFamily="34" charset="-122"/>
-                <a:cs typeface="paybooc OTF" pitchFamily="34" charset="-120"/>
+                <a:latin typeface="Pretendard Light" pitchFamily="34" charset="0"/>
+                <a:ea typeface="Pretendard Light" pitchFamily="34" charset="-122"/>
+                <a:cs typeface="Pretendard Light" pitchFamily="34" charset="-120"/>
               </a:rPr>
               <a:t>복잡한 사주 판도 순서대로 푸는 4단계 리딩 프로세스</a:t>
             </a:r>
@@ -890,9 +890,9 @@
                 <a:solidFill>
                   <a:srgbClr val="FFFFFF"/>
                 </a:solidFill>
-                <a:latin typeface="paybooc OTF" pitchFamily="34" charset="0"/>
-                <a:ea typeface="paybooc OTF" pitchFamily="34" charset="-122"/>
-                <a:cs typeface="paybooc OTF" pitchFamily="34" charset="-120"/>
+                <a:latin typeface="Pretendard Light" pitchFamily="34" charset="0"/>
+                <a:ea typeface="Pretendard Light" pitchFamily="34" charset="-122"/>
+                <a:cs typeface="Pretendard Light" pitchFamily="34" charset="-120"/>
               </a:rPr>
               <a:t>3회차 · 4단계 리딩 프로세스 (실습)</a:t>
             </a:r>
@@ -1082,9 +1082,9 @@
                 <a:solidFill>
                   <a:srgbClr val="0C0A09"/>
                 </a:solidFill>
-                <a:latin typeface="paybooc OTF" pitchFamily="34" charset="0"/>
-                <a:ea typeface="paybooc OTF" pitchFamily="34" charset="-122"/>
-                <a:cs typeface="paybooc OTF" pitchFamily="34" charset="-120"/>
+                <a:latin typeface="Pretendard Light" pitchFamily="34" charset="0"/>
+                <a:ea typeface="Pretendard Light" pitchFamily="34" charset="-122"/>
+                <a:cs typeface="Pretendard Light" pitchFamily="34" charset="-120"/>
               </a:rPr>
               <a:t>수수 사주교육</a:t>
             </a:r>
@@ -1120,9 +1120,9 @@
                 <a:solidFill>
                   <a:srgbClr val="777169"/>
                 </a:solidFill>
-                <a:latin typeface="paybooc OTF" pitchFamily="34" charset="0"/>
-                <a:ea typeface="paybooc OTF" pitchFamily="34" charset="-122"/>
-                <a:cs typeface="paybooc OTF" pitchFamily="34" charset="-120"/>
+                <a:latin typeface="Pretendard Light" pitchFamily="34" charset="0"/>
+                <a:ea typeface="Pretendard Light" pitchFamily="34" charset="-122"/>
+                <a:cs typeface="Pretendard Light" pitchFamily="34" charset="-120"/>
               </a:rPr>
               <a:t>STEP 1 · 실습</a:t>
             </a:r>
@@ -1158,9 +1158,9 @@
                 <a:solidFill>
                   <a:srgbClr val="777169"/>
                 </a:solidFill>
-                <a:latin typeface="paybooc OTF" pitchFamily="34" charset="0"/>
-                <a:ea typeface="paybooc OTF" pitchFamily="34" charset="-122"/>
-                <a:cs typeface="paybooc OTF" pitchFamily="34" charset="-120"/>
+                <a:latin typeface="Pretendard Light" pitchFamily="34" charset="0"/>
+                <a:ea typeface="Pretendard Light" pitchFamily="34" charset="-122"/>
+                <a:cs typeface="Pretendard Light" pitchFamily="34" charset="-120"/>
               </a:rPr>
               <a:t>STEP 1 · 실습</a:t>
             </a:r>
@@ -1234,9 +1234,9 @@
                 <a:solidFill>
                   <a:srgbClr val="777169"/>
                 </a:solidFill>
-                <a:latin typeface="paybooc OTF" pitchFamily="34" charset="0"/>
-                <a:ea typeface="paybooc OTF" pitchFamily="34" charset="-122"/>
-                <a:cs typeface="paybooc OTF" pitchFamily="34" charset="-120"/>
+                <a:latin typeface="Pretendard Light" pitchFamily="34" charset="0"/>
+                <a:ea typeface="Pretendard Light" pitchFamily="34" charset="-122"/>
+                <a:cs typeface="Pretendard Light" pitchFamily="34" charset="-120"/>
               </a:rPr>
               <a:t>신민규 님 명식 (양력 1999.9.5 9시경)</a:t>
             </a:r>
@@ -1366,9 +1366,9 @@
                 <a:solidFill>
                   <a:srgbClr val="0C0A09"/>
                 </a:solidFill>
-                <a:latin typeface="paybooc OTF" pitchFamily="34" charset="0"/>
-                <a:ea typeface="paybooc OTF" pitchFamily="34" charset="-122"/>
-                <a:cs typeface="paybooc OTF" pitchFamily="34" charset="-120"/>
+                <a:latin typeface="Pretendard Light" pitchFamily="34" charset="0"/>
+                <a:ea typeface="Pretendard Light" pitchFamily="34" charset="-122"/>
+                <a:cs typeface="Pretendard Light" pitchFamily="34" charset="-120"/>
               </a:rPr>
               <a:t>일간 庚金 — 원석·도끼</a:t>
             </a:r>
@@ -1539,9 +1539,9 @@
                 <a:solidFill>
                   <a:srgbClr val="0C0A09"/>
                 </a:solidFill>
-                <a:latin typeface="paybooc OTF" pitchFamily="34" charset="0"/>
-                <a:ea typeface="paybooc OTF" pitchFamily="34" charset="-122"/>
-                <a:cs typeface="paybooc OTF" pitchFamily="34" charset="-120"/>
+                <a:latin typeface="Pretendard Light" pitchFamily="34" charset="0"/>
+                <a:ea typeface="Pretendard Light" pitchFamily="34" charset="-122"/>
+                <a:cs typeface="Pretendard Light" pitchFamily="34" charset="-120"/>
               </a:rPr>
               <a:t>월지 申 — 초가을</a:t>
             </a:r>
@@ -1652,9 +1652,9 @@
                 <a:solidFill>
                   <a:srgbClr val="777169"/>
                 </a:solidFill>
-                <a:latin typeface="paybooc OTF" pitchFamily="34" charset="0"/>
-                <a:ea typeface="paybooc OTF" pitchFamily="34" charset="-122"/>
-                <a:cs typeface="paybooc OTF" pitchFamily="34" charset="-120"/>
+                <a:latin typeface="Pretendard Light" pitchFamily="34" charset="0"/>
+                <a:ea typeface="Pretendard Light" pitchFamily="34" charset="-122"/>
+                <a:cs typeface="Pretendard Light" pitchFamily="34" charset="-120"/>
               </a:rPr>
               <a:t>1차 판단</a:t>
             </a:r>
@@ -1926,9 +1926,9 @@
                 <a:solidFill>
                   <a:srgbClr val="0C0A09"/>
                 </a:solidFill>
-                <a:latin typeface="paybooc OTF" pitchFamily="34" charset="0"/>
-                <a:ea typeface="paybooc OTF" pitchFamily="34" charset="-122"/>
-                <a:cs typeface="paybooc OTF" pitchFamily="34" charset="-120"/>
+                <a:latin typeface="Pretendard Light" pitchFamily="34" charset="0"/>
+                <a:ea typeface="Pretendard Light" pitchFamily="34" charset="-122"/>
+                <a:cs typeface="Pretendard Light" pitchFamily="34" charset="-120"/>
               </a:rPr>
               <a:t>수수 사주교육</a:t>
             </a:r>
@@ -1964,9 +1964,9 @@
                 <a:solidFill>
                   <a:srgbClr val="777169"/>
                 </a:solidFill>
-                <a:latin typeface="paybooc OTF" pitchFamily="34" charset="0"/>
-                <a:ea typeface="paybooc OTF" pitchFamily="34" charset="-122"/>
-                <a:cs typeface="paybooc OTF" pitchFamily="34" charset="-120"/>
+                <a:latin typeface="Pretendard Light" pitchFamily="34" charset="0"/>
+                <a:ea typeface="Pretendard Light" pitchFamily="34" charset="-122"/>
+                <a:cs typeface="Pretendard Light" pitchFamily="34" charset="-120"/>
               </a:rPr>
               <a:t>STEP 02</a:t>
             </a:r>
@@ -2002,9 +2002,9 @@
                 <a:solidFill>
                   <a:srgbClr val="777169"/>
                 </a:solidFill>
-                <a:latin typeface="paybooc OTF" pitchFamily="34" charset="0"/>
-                <a:ea typeface="paybooc OTF" pitchFamily="34" charset="-122"/>
-                <a:cs typeface="paybooc OTF" pitchFamily="34" charset="-120"/>
+                <a:latin typeface="Pretendard Light" pitchFamily="34" charset="0"/>
+                <a:ea typeface="Pretendard Light" pitchFamily="34" charset="-122"/>
+                <a:cs typeface="Pretendard Light" pitchFamily="34" charset="-120"/>
               </a:rPr>
               <a:t>STEP 02</a:t>
             </a:r>
@@ -2078,9 +2078,9 @@
                 <a:solidFill>
                   <a:srgbClr val="A8A29E"/>
                 </a:solidFill>
-                <a:latin typeface="paybooc OTF" pitchFamily="34" charset="0"/>
-                <a:ea typeface="paybooc OTF" pitchFamily="34" charset="-122"/>
-                <a:cs typeface="paybooc OTF" pitchFamily="34" charset="-120"/>
+                <a:latin typeface="Pretendard Light" pitchFamily="34" charset="0"/>
+                <a:ea typeface="Pretendard Light" pitchFamily="34" charset="-122"/>
+                <a:cs typeface="Pretendard Light" pitchFamily="34" charset="-120"/>
               </a:rPr>
               <a:t>STRONG or WEAK</a:t>
             </a:r>
@@ -2333,9 +2333,9 @@
                 <a:solidFill>
                   <a:srgbClr val="0C0A09"/>
                 </a:solidFill>
-                <a:latin typeface="paybooc OTF" pitchFamily="34" charset="0"/>
-                <a:ea typeface="paybooc OTF" pitchFamily="34" charset="-122"/>
-                <a:cs typeface="paybooc OTF" pitchFamily="34" charset="-120"/>
+                <a:latin typeface="Pretendard Light" pitchFamily="34" charset="0"/>
+                <a:ea typeface="Pretendard Light" pitchFamily="34" charset="-122"/>
+                <a:cs typeface="Pretendard Light" pitchFamily="34" charset="-120"/>
               </a:rPr>
               <a:t>수수 사주교육</a:t>
             </a:r>
@@ -2371,9 +2371,9 @@
                 <a:solidFill>
                   <a:srgbClr val="777169"/>
                 </a:solidFill>
-                <a:latin typeface="paybooc OTF" pitchFamily="34" charset="0"/>
-                <a:ea typeface="paybooc OTF" pitchFamily="34" charset="-122"/>
-                <a:cs typeface="paybooc OTF" pitchFamily="34" charset="-120"/>
+                <a:latin typeface="Pretendard Light" pitchFamily="34" charset="0"/>
+                <a:ea typeface="Pretendard Light" pitchFamily="34" charset="-122"/>
+                <a:cs typeface="Pretendard Light" pitchFamily="34" charset="-120"/>
               </a:rPr>
               <a:t>STEP 2</a:t>
             </a:r>
@@ -2409,9 +2409,9 @@
                 <a:solidFill>
                   <a:srgbClr val="777169"/>
                 </a:solidFill>
-                <a:latin typeface="paybooc OTF" pitchFamily="34" charset="0"/>
-                <a:ea typeface="paybooc OTF" pitchFamily="34" charset="-122"/>
-                <a:cs typeface="paybooc OTF" pitchFamily="34" charset="-120"/>
+                <a:latin typeface="Pretendard Light" pitchFamily="34" charset="0"/>
+                <a:ea typeface="Pretendard Light" pitchFamily="34" charset="-122"/>
+                <a:cs typeface="Pretendard Light" pitchFamily="34" charset="-120"/>
               </a:rPr>
               <a:t>STEP 2 · 신강·신약</a:t>
             </a:r>
@@ -2485,9 +2485,9 @@
                 <a:solidFill>
                   <a:srgbClr val="777169"/>
                 </a:solidFill>
-                <a:latin typeface="paybooc OTF" pitchFamily="34" charset="0"/>
-                <a:ea typeface="paybooc OTF" pitchFamily="34" charset="-122"/>
-                <a:cs typeface="paybooc OTF" pitchFamily="34" charset="-120"/>
+                <a:latin typeface="Pretendard Light" pitchFamily="34" charset="0"/>
+                <a:ea typeface="Pretendard Light" pitchFamily="34" charset="-122"/>
+                <a:cs typeface="Pretendard Light" pitchFamily="34" charset="-120"/>
               </a:rPr>
               <a:t>내 에너지가 강한가, 약한가</a:t>
             </a:r>
@@ -2579,9 +2579,9 @@
                 <a:solidFill>
                   <a:srgbClr val="777169"/>
                 </a:solidFill>
-                <a:latin typeface="paybooc OTF" pitchFamily="34" charset="0"/>
-                <a:ea typeface="paybooc OTF" pitchFamily="34" charset="-122"/>
-                <a:cs typeface="paybooc OTF" pitchFamily="34" charset="-120"/>
+                <a:latin typeface="Pretendard Light" pitchFamily="34" charset="0"/>
+                <a:ea typeface="Pretendard Light" pitchFamily="34" charset="-122"/>
+                <a:cs typeface="Pretendard Light" pitchFamily="34" charset="-120"/>
               </a:rPr>
               <a:t>身强 · 신강</a:t>
             </a:r>
@@ -2617,9 +2617,9 @@
                 <a:solidFill>
                   <a:srgbClr val="0C0A09"/>
                 </a:solidFill>
-                <a:latin typeface="paybooc OTF" pitchFamily="34" charset="0"/>
-                <a:ea typeface="paybooc OTF" pitchFamily="34" charset="-122"/>
-                <a:cs typeface="paybooc OTF" pitchFamily="34" charset="-120"/>
+                <a:latin typeface="Pretendard Light" pitchFamily="34" charset="0"/>
+                <a:ea typeface="Pretendard Light" pitchFamily="34" charset="-122"/>
+                <a:cs typeface="Pretendard Light" pitchFamily="34" charset="-120"/>
               </a:rPr>
               <a:t>스스로 끌고 간다</a:t>
             </a:r>
@@ -2813,9 +2813,9 @@
                 <a:solidFill>
                   <a:srgbClr val="777169"/>
                 </a:solidFill>
-                <a:latin typeface="paybooc OTF" pitchFamily="34" charset="0"/>
-                <a:ea typeface="paybooc OTF" pitchFamily="34" charset="-122"/>
-                <a:cs typeface="paybooc OTF" pitchFamily="34" charset="-120"/>
+                <a:latin typeface="Pretendard Light" pitchFamily="34" charset="0"/>
+                <a:ea typeface="Pretendard Light" pitchFamily="34" charset="-122"/>
+                <a:cs typeface="Pretendard Light" pitchFamily="34" charset="-120"/>
               </a:rPr>
               <a:t>身弱 · 신약</a:t>
             </a:r>
@@ -2851,9 +2851,9 @@
                 <a:solidFill>
                   <a:srgbClr val="0C0A09"/>
                 </a:solidFill>
-                <a:latin typeface="paybooc OTF" pitchFamily="34" charset="0"/>
-                <a:ea typeface="paybooc OTF" pitchFamily="34" charset="-122"/>
-                <a:cs typeface="paybooc OTF" pitchFamily="34" charset="-120"/>
+                <a:latin typeface="Pretendard Light" pitchFamily="34" charset="0"/>
+                <a:ea typeface="Pretendard Light" pitchFamily="34" charset="-122"/>
+                <a:cs typeface="Pretendard Light" pitchFamily="34" charset="-120"/>
               </a:rPr>
               <a:t>주변 도움이 필요</a:t>
             </a:r>
@@ -3025,9 +3025,9 @@
                 <a:solidFill>
                   <a:srgbClr val="777169"/>
                 </a:solidFill>
-                <a:latin typeface="paybooc OTF" pitchFamily="34" charset="0"/>
-                <a:ea typeface="paybooc OTF" pitchFamily="34" charset="-122"/>
-                <a:cs typeface="paybooc OTF" pitchFamily="34" charset="-120"/>
+                <a:latin typeface="Pretendard Light" pitchFamily="34" charset="0"/>
+                <a:ea typeface="Pretendard Light" pitchFamily="34" charset="-122"/>
+                <a:cs typeface="Pretendard Light" pitchFamily="34" charset="-120"/>
               </a:rPr>
               <a:t>핵심</a:t>
             </a:r>
@@ -3258,9 +3258,9 @@
                 <a:solidFill>
                   <a:srgbClr val="0C0A09"/>
                 </a:solidFill>
-                <a:latin typeface="paybooc OTF" pitchFamily="34" charset="0"/>
-                <a:ea typeface="paybooc OTF" pitchFamily="34" charset="-122"/>
-                <a:cs typeface="paybooc OTF" pitchFamily="34" charset="-120"/>
+                <a:latin typeface="Pretendard Light" pitchFamily="34" charset="0"/>
+                <a:ea typeface="Pretendard Light" pitchFamily="34" charset="-122"/>
+                <a:cs typeface="Pretendard Light" pitchFamily="34" charset="-120"/>
               </a:rPr>
               <a:t>수수 사주교육</a:t>
             </a:r>
@@ -3296,9 +3296,9 @@
                 <a:solidFill>
                   <a:srgbClr val="777169"/>
                 </a:solidFill>
-                <a:latin typeface="paybooc OTF" pitchFamily="34" charset="0"/>
-                <a:ea typeface="paybooc OTF" pitchFamily="34" charset="-122"/>
-                <a:cs typeface="paybooc OTF" pitchFamily="34" charset="-120"/>
+                <a:latin typeface="Pretendard Light" pitchFamily="34" charset="0"/>
+                <a:ea typeface="Pretendard Light" pitchFamily="34" charset="-122"/>
+                <a:cs typeface="Pretendard Light" pitchFamily="34" charset="-120"/>
               </a:rPr>
               <a:t>STEP 2</a:t>
             </a:r>
@@ -3334,9 +3334,9 @@
                 <a:solidFill>
                   <a:srgbClr val="777169"/>
                 </a:solidFill>
-                <a:latin typeface="paybooc OTF" pitchFamily="34" charset="0"/>
-                <a:ea typeface="paybooc OTF" pitchFamily="34" charset="-122"/>
-                <a:cs typeface="paybooc OTF" pitchFamily="34" charset="-120"/>
+                <a:latin typeface="Pretendard Light" pitchFamily="34" charset="0"/>
+                <a:ea typeface="Pretendard Light" pitchFamily="34" charset="-122"/>
+                <a:cs typeface="Pretendard Light" pitchFamily="34" charset="-120"/>
               </a:rPr>
               <a:t>STEP 2 · 신강·신약</a:t>
             </a:r>
@@ -3410,9 +3410,9 @@
                 <a:solidFill>
                   <a:srgbClr val="777169"/>
                 </a:solidFill>
-                <a:latin typeface="paybooc OTF" pitchFamily="34" charset="0"/>
-                <a:ea typeface="paybooc OTF" pitchFamily="34" charset="-122"/>
-                <a:cs typeface="paybooc OTF" pitchFamily="34" charset="-120"/>
+                <a:latin typeface="Pretendard Light" pitchFamily="34" charset="0"/>
+                <a:ea typeface="Pretendard Light" pitchFamily="34" charset="-122"/>
+                <a:cs typeface="Pretendard Light" pitchFamily="34" charset="-120"/>
               </a:rPr>
               <a:t>득령 · 득지 · 득세</a:t>
             </a:r>
@@ -3482,9 +3482,9 @@
                 <a:solidFill>
                   <a:srgbClr val="777169"/>
                 </a:solidFill>
-                <a:latin typeface="paybooc OTF" pitchFamily="34" charset="0"/>
-                <a:ea typeface="paybooc OTF" pitchFamily="34" charset="-122"/>
-                <a:cs typeface="paybooc OTF" pitchFamily="34" charset="-120"/>
+                <a:latin typeface="Pretendard Light" pitchFamily="34" charset="0"/>
+                <a:ea typeface="Pretendard Light" pitchFamily="34" charset="-122"/>
+                <a:cs typeface="Pretendard Light" pitchFamily="34" charset="-120"/>
               </a:rPr>
               <a:t>得令 · 득령</a:t>
             </a:r>
@@ -3520,9 +3520,9 @@
                 <a:solidFill>
                   <a:srgbClr val="0C0A09"/>
                 </a:solidFill>
-                <a:latin typeface="paybooc OTF" pitchFamily="34" charset="0"/>
-                <a:ea typeface="paybooc OTF" pitchFamily="34" charset="-122"/>
-                <a:cs typeface="paybooc OTF" pitchFamily="34" charset="-120"/>
+                <a:latin typeface="Pretendard Light" pitchFamily="34" charset="0"/>
+                <a:ea typeface="Pretendard Light" pitchFamily="34" charset="-122"/>
+                <a:cs typeface="Pretendard Light" pitchFamily="34" charset="-120"/>
               </a:rPr>
               <a:t>월지가 내 편?</a:t>
             </a:r>
@@ -3633,9 +3633,9 @@
                 <a:solidFill>
                   <a:srgbClr val="777169"/>
                 </a:solidFill>
-                <a:latin typeface="paybooc OTF" pitchFamily="34" charset="0"/>
-                <a:ea typeface="paybooc OTF" pitchFamily="34" charset="-122"/>
-                <a:cs typeface="paybooc OTF" pitchFamily="34" charset="-120"/>
+                <a:latin typeface="Pretendard Light" pitchFamily="34" charset="0"/>
+                <a:ea typeface="Pretendard Light" pitchFamily="34" charset="-122"/>
+                <a:cs typeface="Pretendard Light" pitchFamily="34" charset="-120"/>
               </a:rPr>
               <a:t>得地 · 득지</a:t>
             </a:r>
@@ -3671,9 +3671,9 @@
                 <a:solidFill>
                   <a:srgbClr val="0C0A09"/>
                 </a:solidFill>
-                <a:latin typeface="paybooc OTF" pitchFamily="34" charset="0"/>
-                <a:ea typeface="paybooc OTF" pitchFamily="34" charset="-122"/>
-                <a:cs typeface="paybooc OTF" pitchFamily="34" charset="-120"/>
+                <a:latin typeface="Pretendard Light" pitchFamily="34" charset="0"/>
+                <a:ea typeface="Pretendard Light" pitchFamily="34" charset="-122"/>
+                <a:cs typeface="Pretendard Light" pitchFamily="34" charset="-120"/>
               </a:rPr>
               <a:t>일지가 내 편?</a:t>
             </a:r>
@@ -3784,9 +3784,9 @@
                 <a:solidFill>
                   <a:srgbClr val="777169"/>
                 </a:solidFill>
-                <a:latin typeface="paybooc OTF" pitchFamily="34" charset="0"/>
-                <a:ea typeface="paybooc OTF" pitchFamily="34" charset="-122"/>
-                <a:cs typeface="paybooc OTF" pitchFamily="34" charset="-120"/>
+                <a:latin typeface="Pretendard Light" pitchFamily="34" charset="0"/>
+                <a:ea typeface="Pretendard Light" pitchFamily="34" charset="-122"/>
+                <a:cs typeface="Pretendard Light" pitchFamily="34" charset="-120"/>
               </a:rPr>
               <a:t>得勢 · 득세</a:t>
             </a:r>
@@ -3822,9 +3822,9 @@
                 <a:solidFill>
                   <a:srgbClr val="0C0A09"/>
                 </a:solidFill>
-                <a:latin typeface="paybooc OTF" pitchFamily="34" charset="0"/>
-                <a:ea typeface="paybooc OTF" pitchFamily="34" charset="-122"/>
-                <a:cs typeface="paybooc OTF" pitchFamily="34" charset="-120"/>
+                <a:latin typeface="Pretendard Light" pitchFamily="34" charset="0"/>
+                <a:ea typeface="Pretendard Light" pitchFamily="34" charset="-122"/>
+                <a:cs typeface="Pretendard Light" pitchFamily="34" charset="-120"/>
               </a:rPr>
               <a:t>주변이 내 편?</a:t>
             </a:r>
@@ -3935,9 +3935,9 @@
                 <a:solidFill>
                   <a:srgbClr val="777169"/>
                 </a:solidFill>
-                <a:latin typeface="paybooc OTF" pitchFamily="34" charset="0"/>
-                <a:ea typeface="paybooc OTF" pitchFamily="34" charset="-122"/>
-                <a:cs typeface="paybooc OTF" pitchFamily="34" charset="-120"/>
+                <a:latin typeface="Pretendard Light" pitchFamily="34" charset="0"/>
+                <a:ea typeface="Pretendard Light" pitchFamily="34" charset="-122"/>
+                <a:cs typeface="Pretendard Light" pitchFamily="34" charset="-120"/>
               </a:rPr>
               <a:t>정리</a:t>
             </a:r>
@@ -4168,9 +4168,9 @@
                 <a:solidFill>
                   <a:srgbClr val="0C0A09"/>
                 </a:solidFill>
-                <a:latin typeface="paybooc OTF" pitchFamily="34" charset="0"/>
-                <a:ea typeface="paybooc OTF" pitchFamily="34" charset="-122"/>
-                <a:cs typeface="paybooc OTF" pitchFamily="34" charset="-120"/>
+                <a:latin typeface="Pretendard Light" pitchFamily="34" charset="0"/>
+                <a:ea typeface="Pretendard Light" pitchFamily="34" charset="-122"/>
+                <a:cs typeface="Pretendard Light" pitchFamily="34" charset="-120"/>
               </a:rPr>
               <a:t>수수 사주교육</a:t>
             </a:r>
@@ -4206,9 +4206,9 @@
                 <a:solidFill>
                   <a:srgbClr val="777169"/>
                 </a:solidFill>
-                <a:latin typeface="paybooc OTF" pitchFamily="34" charset="0"/>
-                <a:ea typeface="paybooc OTF" pitchFamily="34" charset="-122"/>
-                <a:cs typeface="paybooc OTF" pitchFamily="34" charset="-120"/>
+                <a:latin typeface="Pretendard Light" pitchFamily="34" charset="0"/>
+                <a:ea typeface="Pretendard Light" pitchFamily="34" charset="-122"/>
+                <a:cs typeface="Pretendard Light" pitchFamily="34" charset="-120"/>
               </a:rPr>
               <a:t>STEP 2</a:t>
             </a:r>
@@ -4244,9 +4244,9 @@
                 <a:solidFill>
                   <a:srgbClr val="777169"/>
                 </a:solidFill>
-                <a:latin typeface="paybooc OTF" pitchFamily="34" charset="0"/>
-                <a:ea typeface="paybooc OTF" pitchFamily="34" charset="-122"/>
-                <a:cs typeface="paybooc OTF" pitchFamily="34" charset="-120"/>
+                <a:latin typeface="Pretendard Light" pitchFamily="34" charset="0"/>
+                <a:ea typeface="Pretendard Light" pitchFamily="34" charset="-122"/>
+                <a:cs typeface="Pretendard Light" pitchFamily="34" charset="-120"/>
               </a:rPr>
               <a:t>STEP 2 · 신강·신약</a:t>
             </a:r>
@@ -4320,9 +4320,9 @@
                 <a:solidFill>
                   <a:srgbClr val="777169"/>
                 </a:solidFill>
-                <a:latin typeface="paybooc OTF" pitchFamily="34" charset="0"/>
-                <a:ea typeface="paybooc OTF" pitchFamily="34" charset="-122"/>
-                <a:cs typeface="paybooc OTF" pitchFamily="34" charset="-120"/>
+                <a:latin typeface="Pretendard Light" pitchFamily="34" charset="0"/>
+                <a:ea typeface="Pretendard Light" pitchFamily="34" charset="-122"/>
+                <a:cs typeface="Pretendard Light" pitchFamily="34" charset="-120"/>
               </a:rPr>
               <a:t>일간을 돕는 글자 vs 힘 빼는 글자</a:t>
             </a:r>
@@ -4414,9 +4414,9 @@
                 <a:solidFill>
                   <a:srgbClr val="777169"/>
                 </a:solidFill>
-                <a:latin typeface="paybooc OTF" pitchFamily="34" charset="0"/>
-                <a:ea typeface="paybooc OTF" pitchFamily="34" charset="-122"/>
-                <a:cs typeface="paybooc OTF" pitchFamily="34" charset="-120"/>
+                <a:latin typeface="Pretendard Light" pitchFamily="34" charset="0"/>
+                <a:ea typeface="Pretendard Light" pitchFamily="34" charset="-122"/>
+                <a:cs typeface="Pretendard Light" pitchFamily="34" charset="-120"/>
               </a:rPr>
               <a:t>내 편 · 강하게</a:t>
             </a:r>
@@ -4452,9 +4452,9 @@
                 <a:solidFill>
                   <a:srgbClr val="0C0A09"/>
                 </a:solidFill>
-                <a:latin typeface="paybooc OTF" pitchFamily="34" charset="0"/>
-                <a:ea typeface="paybooc OTF" pitchFamily="34" charset="-122"/>
-                <a:cs typeface="paybooc OTF" pitchFamily="34" charset="-120"/>
+                <a:latin typeface="Pretendard Light" pitchFamily="34" charset="0"/>
+                <a:ea typeface="Pretendard Light" pitchFamily="34" charset="-122"/>
+                <a:cs typeface="Pretendard Light" pitchFamily="34" charset="-120"/>
               </a:rPr>
               <a:t>비겁 · 인성</a:t>
             </a:r>
@@ -4648,9 +4648,9 @@
                 <a:solidFill>
                   <a:srgbClr val="777169"/>
                 </a:solidFill>
-                <a:latin typeface="paybooc OTF" pitchFamily="34" charset="0"/>
-                <a:ea typeface="paybooc OTF" pitchFamily="34" charset="-122"/>
-                <a:cs typeface="paybooc OTF" pitchFamily="34" charset="-120"/>
+                <a:latin typeface="Pretendard Light" pitchFamily="34" charset="0"/>
+                <a:ea typeface="Pretendard Light" pitchFamily="34" charset="-122"/>
+                <a:cs typeface="Pretendard Light" pitchFamily="34" charset="-120"/>
               </a:rPr>
               <a:t>힘 빼는 편 · 약하게</a:t>
             </a:r>
@@ -4686,9 +4686,9 @@
                 <a:solidFill>
                   <a:srgbClr val="0C0A09"/>
                 </a:solidFill>
-                <a:latin typeface="paybooc OTF" pitchFamily="34" charset="0"/>
-                <a:ea typeface="paybooc OTF" pitchFamily="34" charset="-122"/>
-                <a:cs typeface="paybooc OTF" pitchFamily="34" charset="-120"/>
+                <a:latin typeface="Pretendard Light" pitchFamily="34" charset="0"/>
+                <a:ea typeface="Pretendard Light" pitchFamily="34" charset="-122"/>
+                <a:cs typeface="Pretendard Light" pitchFamily="34" charset="-120"/>
               </a:rPr>
               <a:t>식상 · 재성 · 관성</a:t>
             </a:r>
@@ -4860,9 +4860,9 @@
                 <a:solidFill>
                   <a:srgbClr val="777169"/>
                 </a:solidFill>
-                <a:latin typeface="paybooc OTF" pitchFamily="34" charset="0"/>
-                <a:ea typeface="paybooc OTF" pitchFamily="34" charset="-122"/>
-                <a:cs typeface="paybooc OTF" pitchFamily="34" charset="-120"/>
+                <a:latin typeface="Pretendard Light" pitchFamily="34" charset="0"/>
+                <a:ea typeface="Pretendard Light" pitchFamily="34" charset="-122"/>
+                <a:cs typeface="Pretendard Light" pitchFamily="34" charset="-120"/>
               </a:rPr>
               <a:t>세는 법</a:t>
             </a:r>
@@ -5093,9 +5093,9 @@
                 <a:solidFill>
                   <a:srgbClr val="0C0A09"/>
                 </a:solidFill>
-                <a:latin typeface="paybooc OTF" pitchFamily="34" charset="0"/>
-                <a:ea typeface="paybooc OTF" pitchFamily="34" charset="-122"/>
-                <a:cs typeface="paybooc OTF" pitchFamily="34" charset="-120"/>
+                <a:latin typeface="Pretendard Light" pitchFamily="34" charset="0"/>
+                <a:ea typeface="Pretendard Light" pitchFamily="34" charset="-122"/>
+                <a:cs typeface="Pretendard Light" pitchFamily="34" charset="-120"/>
               </a:rPr>
               <a:t>수수 사주교육</a:t>
             </a:r>
@@ -5131,9 +5131,9 @@
                 <a:solidFill>
                   <a:srgbClr val="777169"/>
                 </a:solidFill>
-                <a:latin typeface="paybooc OTF" pitchFamily="34" charset="0"/>
-                <a:ea typeface="paybooc OTF" pitchFamily="34" charset="-122"/>
-                <a:cs typeface="paybooc OTF" pitchFamily="34" charset="-120"/>
+                <a:latin typeface="Pretendard Light" pitchFamily="34" charset="0"/>
+                <a:ea typeface="Pretendard Light" pitchFamily="34" charset="-122"/>
+                <a:cs typeface="Pretendard Light" pitchFamily="34" charset="-120"/>
               </a:rPr>
               <a:t>STEP 2 · 실습</a:t>
             </a:r>
@@ -5169,9 +5169,9 @@
                 <a:solidFill>
                   <a:srgbClr val="777169"/>
                 </a:solidFill>
-                <a:latin typeface="paybooc OTF" pitchFamily="34" charset="0"/>
-                <a:ea typeface="paybooc OTF" pitchFamily="34" charset="-122"/>
-                <a:cs typeface="paybooc OTF" pitchFamily="34" charset="-120"/>
+                <a:latin typeface="Pretendard Light" pitchFamily="34" charset="0"/>
+                <a:ea typeface="Pretendard Light" pitchFamily="34" charset="-122"/>
+                <a:cs typeface="Pretendard Light" pitchFamily="34" charset="-120"/>
               </a:rPr>
               <a:t>STEP 2 · 실습</a:t>
             </a:r>
@@ -5245,9 +5245,9 @@
                 <a:solidFill>
                   <a:srgbClr val="777169"/>
                 </a:solidFill>
-                <a:latin typeface="paybooc OTF" pitchFamily="34" charset="0"/>
-                <a:ea typeface="paybooc OTF" pitchFamily="34" charset="-122"/>
-                <a:cs typeface="paybooc OTF" pitchFamily="34" charset="-120"/>
+                <a:latin typeface="Pretendard Light" pitchFamily="34" charset="0"/>
+                <a:ea typeface="Pretendard Light" pitchFamily="34" charset="-122"/>
+                <a:cs typeface="Pretendard Light" pitchFamily="34" charset="-120"/>
               </a:rPr>
               <a:t>신민규 님 명식 — 오행 분포로 세어보기</a:t>
             </a:r>
@@ -5317,9 +5317,9 @@
                 <a:solidFill>
                   <a:srgbClr val="777169"/>
                 </a:solidFill>
-                <a:latin typeface="paybooc OTF" pitchFamily="34" charset="0"/>
-                <a:ea typeface="paybooc OTF" pitchFamily="34" charset="-122"/>
-                <a:cs typeface="paybooc OTF" pitchFamily="34" charset="-120"/>
+                <a:latin typeface="Pretendard Light" pitchFamily="34" charset="0"/>
+                <a:ea typeface="Pretendard Light" pitchFamily="34" charset="-122"/>
+                <a:cs typeface="Pretendard Light" pitchFamily="34" charset="-120"/>
               </a:rPr>
               <a:t>오행 분포</a:t>
             </a:r>
@@ -5430,9 +5430,9 @@
                 <a:solidFill>
                   <a:srgbClr val="777169"/>
                 </a:solidFill>
-                <a:latin typeface="paybooc OTF" pitchFamily="34" charset="0"/>
-                <a:ea typeface="paybooc OTF" pitchFamily="34" charset="-122"/>
-                <a:cs typeface="paybooc OTF" pitchFamily="34" charset="-120"/>
+                <a:latin typeface="Pretendard Light" pitchFamily="34" charset="0"/>
+                <a:ea typeface="Pretendard Light" pitchFamily="34" charset="-122"/>
+                <a:cs typeface="Pretendard Light" pitchFamily="34" charset="-120"/>
               </a:rPr>
               <a:t>내 편 세기</a:t>
             </a:r>
@@ -5468,9 +5468,9 @@
                 <a:solidFill>
                   <a:srgbClr val="0C0A09"/>
                 </a:solidFill>
-                <a:latin typeface="paybooc OTF" pitchFamily="34" charset="0"/>
-                <a:ea typeface="paybooc OTF" pitchFamily="34" charset="-122"/>
-                <a:cs typeface="paybooc OTF" pitchFamily="34" charset="-120"/>
+                <a:latin typeface="Pretendard Light" pitchFamily="34" charset="0"/>
+                <a:ea typeface="Pretendard Light" pitchFamily="34" charset="-122"/>
+                <a:cs typeface="Pretendard Light" pitchFamily="34" charset="-120"/>
               </a:rPr>
               <a:t>비겁 + 인성</a:t>
             </a:r>
@@ -5581,9 +5581,9 @@
                 <a:solidFill>
                   <a:srgbClr val="777169"/>
                 </a:solidFill>
-                <a:latin typeface="paybooc OTF" pitchFamily="34" charset="0"/>
-                <a:ea typeface="paybooc OTF" pitchFamily="34" charset="-122"/>
-                <a:cs typeface="paybooc OTF" pitchFamily="34" charset="-120"/>
+                <a:latin typeface="Pretendard Light" pitchFamily="34" charset="0"/>
+                <a:ea typeface="Pretendard Light" pitchFamily="34" charset="-122"/>
+                <a:cs typeface="Pretendard Light" pitchFamily="34" charset="-120"/>
               </a:rPr>
               <a:t>게다가</a:t>
             </a:r>
@@ -5619,9 +5619,9 @@
                 <a:solidFill>
                   <a:srgbClr val="0C0A09"/>
                 </a:solidFill>
-                <a:latin typeface="paybooc OTF" pitchFamily="34" charset="0"/>
-                <a:ea typeface="paybooc OTF" pitchFamily="34" charset="-122"/>
-                <a:cs typeface="paybooc OTF" pitchFamily="34" charset="-120"/>
+                <a:latin typeface="Pretendard Light" pitchFamily="34" charset="0"/>
+                <a:ea typeface="Pretendard Light" pitchFamily="34" charset="-122"/>
+                <a:cs typeface="Pretendard Light" pitchFamily="34" charset="-120"/>
               </a:rPr>
               <a:t>득령까지</a:t>
             </a:r>
@@ -5732,9 +5732,9 @@
                 <a:solidFill>
                   <a:srgbClr val="777169"/>
                 </a:solidFill>
-                <a:latin typeface="paybooc OTF" pitchFamily="34" charset="0"/>
-                <a:ea typeface="paybooc OTF" pitchFamily="34" charset="-122"/>
-                <a:cs typeface="paybooc OTF" pitchFamily="34" charset="-120"/>
+                <a:latin typeface="Pretendard Light" pitchFamily="34" charset="0"/>
+                <a:ea typeface="Pretendard Light" pitchFamily="34" charset="-122"/>
+                <a:cs typeface="Pretendard Light" pitchFamily="34" charset="-120"/>
               </a:rPr>
               <a:t>판정</a:t>
             </a:r>
@@ -5770,9 +5770,9 @@
                 <a:solidFill>
                   <a:srgbClr val="0C0A09"/>
                 </a:solidFill>
-                <a:latin typeface="paybooc OTF" pitchFamily="34" charset="0"/>
-                <a:ea typeface="paybooc OTF" pitchFamily="34" charset="-122"/>
-                <a:cs typeface="paybooc OTF" pitchFamily="34" charset="-120"/>
+                <a:latin typeface="Pretendard Light" pitchFamily="34" charset="0"/>
+                <a:ea typeface="Pretendard Light" pitchFamily="34" charset="-122"/>
+                <a:cs typeface="Pretendard Light" pitchFamily="34" charset="-120"/>
               </a:rPr>
               <a:t>신강 사주</a:t>
             </a:r>
@@ -6063,9 +6063,9 @@
                 <a:solidFill>
                   <a:srgbClr val="0C0A09"/>
                 </a:solidFill>
-                <a:latin typeface="paybooc OTF" pitchFamily="34" charset="0"/>
-                <a:ea typeface="paybooc OTF" pitchFamily="34" charset="-122"/>
-                <a:cs typeface="paybooc OTF" pitchFamily="34" charset="-120"/>
+                <a:latin typeface="Pretendard Light" pitchFamily="34" charset="0"/>
+                <a:ea typeface="Pretendard Light" pitchFamily="34" charset="-122"/>
+                <a:cs typeface="Pretendard Light" pitchFamily="34" charset="-120"/>
               </a:rPr>
               <a:t>수수 사주교육</a:t>
             </a:r>
@@ -6101,9 +6101,9 @@
                 <a:solidFill>
                   <a:srgbClr val="777169"/>
                 </a:solidFill>
-                <a:latin typeface="paybooc OTF" pitchFamily="34" charset="0"/>
-                <a:ea typeface="paybooc OTF" pitchFamily="34" charset="-122"/>
-                <a:cs typeface="paybooc OTF" pitchFamily="34" charset="-120"/>
+                <a:latin typeface="Pretendard Light" pitchFamily="34" charset="0"/>
+                <a:ea typeface="Pretendard Light" pitchFamily="34" charset="-122"/>
+                <a:cs typeface="Pretendard Light" pitchFamily="34" charset="-120"/>
               </a:rPr>
               <a:t>STEP 03</a:t>
             </a:r>
@@ -6139,9 +6139,9 @@
                 <a:solidFill>
                   <a:srgbClr val="777169"/>
                 </a:solidFill>
-                <a:latin typeface="paybooc OTF" pitchFamily="34" charset="0"/>
-                <a:ea typeface="paybooc OTF" pitchFamily="34" charset="-122"/>
-                <a:cs typeface="paybooc OTF" pitchFamily="34" charset="-120"/>
+                <a:latin typeface="Pretendard Light" pitchFamily="34" charset="0"/>
+                <a:ea typeface="Pretendard Light" pitchFamily="34" charset="-122"/>
+                <a:cs typeface="Pretendard Light" pitchFamily="34" charset="-120"/>
               </a:rPr>
               <a:t>STEP 03</a:t>
             </a:r>
@@ -6215,9 +6215,9 @@
                 <a:solidFill>
                   <a:srgbClr val="A8A29E"/>
                 </a:solidFill>
-                <a:latin typeface="paybooc OTF" pitchFamily="34" charset="0"/>
-                <a:ea typeface="paybooc OTF" pitchFamily="34" charset="-122"/>
-                <a:cs typeface="paybooc OTF" pitchFamily="34" charset="-120"/>
+                <a:latin typeface="Pretendard Light" pitchFamily="34" charset="0"/>
+                <a:ea typeface="Pretendard Light" pitchFamily="34" charset="-122"/>
+                <a:cs typeface="Pretendard Light" pitchFamily="34" charset="-120"/>
               </a:rPr>
               <a:t>THE KEY ELEMENT</a:t>
             </a:r>
@@ -6448,9 +6448,9 @@
                 <a:solidFill>
                   <a:srgbClr val="0C0A09"/>
                 </a:solidFill>
-                <a:latin typeface="paybooc OTF" pitchFamily="34" charset="0"/>
-                <a:ea typeface="paybooc OTF" pitchFamily="34" charset="-122"/>
-                <a:cs typeface="paybooc OTF" pitchFamily="34" charset="-120"/>
+                <a:latin typeface="Pretendard Light" pitchFamily="34" charset="0"/>
+                <a:ea typeface="Pretendard Light" pitchFamily="34" charset="-122"/>
+                <a:cs typeface="Pretendard Light" pitchFamily="34" charset="-120"/>
               </a:rPr>
               <a:t>수수 사주교육</a:t>
             </a:r>
@@ -6486,9 +6486,9 @@
                 <a:solidFill>
                   <a:srgbClr val="777169"/>
                 </a:solidFill>
-                <a:latin typeface="paybooc OTF" pitchFamily="34" charset="0"/>
-                <a:ea typeface="paybooc OTF" pitchFamily="34" charset="-122"/>
-                <a:cs typeface="paybooc OTF" pitchFamily="34" charset="-120"/>
+                <a:latin typeface="Pretendard Light" pitchFamily="34" charset="0"/>
+                <a:ea typeface="Pretendard Light" pitchFamily="34" charset="-122"/>
+                <a:cs typeface="Pretendard Light" pitchFamily="34" charset="-120"/>
               </a:rPr>
               <a:t>STEP 3</a:t>
             </a:r>
@@ -6524,9 +6524,9 @@
                 <a:solidFill>
                   <a:srgbClr val="777169"/>
                 </a:solidFill>
-                <a:latin typeface="paybooc OTF" pitchFamily="34" charset="0"/>
-                <a:ea typeface="paybooc OTF" pitchFamily="34" charset="-122"/>
-                <a:cs typeface="paybooc OTF" pitchFamily="34" charset="-120"/>
+                <a:latin typeface="Pretendard Light" pitchFamily="34" charset="0"/>
+                <a:ea typeface="Pretendard Light" pitchFamily="34" charset="-122"/>
+                <a:cs typeface="Pretendard Light" pitchFamily="34" charset="-120"/>
               </a:rPr>
               <a:t>STEP 3 · 용신</a:t>
             </a:r>
@@ -6600,9 +6600,9 @@
                 <a:solidFill>
                   <a:srgbClr val="777169"/>
                 </a:solidFill>
-                <a:latin typeface="paybooc OTF" pitchFamily="34" charset="0"/>
-                <a:ea typeface="paybooc OTF" pitchFamily="34" charset="-122"/>
-                <a:cs typeface="paybooc OTF" pitchFamily="34" charset="-120"/>
+                <a:latin typeface="Pretendard Light" pitchFamily="34" charset="0"/>
+                <a:ea typeface="Pretendard Light" pitchFamily="34" charset="-122"/>
+                <a:cs typeface="Pretendard Light" pitchFamily="34" charset="-120"/>
               </a:rPr>
               <a:t>균형을 잡아주는 해결사 글자</a:t>
             </a:r>
@@ -6672,9 +6672,9 @@
                 <a:solidFill>
                   <a:srgbClr val="777169"/>
                 </a:solidFill>
-                <a:latin typeface="paybooc OTF" pitchFamily="34" charset="0"/>
-                <a:ea typeface="paybooc OTF" pitchFamily="34" charset="-122"/>
-                <a:cs typeface="paybooc OTF" pitchFamily="34" charset="-120"/>
+                <a:latin typeface="Pretendard Light" pitchFamily="34" charset="0"/>
+                <a:ea typeface="Pretendard Light" pitchFamily="34" charset="-122"/>
+                <a:cs typeface="Pretendard Light" pitchFamily="34" charset="-120"/>
               </a:rPr>
               <a:t>해결사</a:t>
             </a:r>
@@ -6710,9 +6710,9 @@
                 <a:solidFill>
                   <a:srgbClr val="0C0A09"/>
                 </a:solidFill>
-                <a:latin typeface="paybooc OTF" pitchFamily="34" charset="0"/>
-                <a:ea typeface="paybooc OTF" pitchFamily="34" charset="-122"/>
-                <a:cs typeface="paybooc OTF" pitchFamily="34" charset="-120"/>
+                <a:latin typeface="Pretendard Light" pitchFamily="34" charset="0"/>
+                <a:ea typeface="Pretendard Light" pitchFamily="34" charset="-122"/>
+                <a:cs typeface="Pretendard Light" pitchFamily="34" charset="-120"/>
               </a:rPr>
               <a:t>가장 요긴한 오행</a:t>
             </a:r>
@@ -6823,9 +6823,9 @@
                 <a:solidFill>
                   <a:srgbClr val="777169"/>
                 </a:solidFill>
-                <a:latin typeface="paybooc OTF" pitchFamily="34" charset="0"/>
-                <a:ea typeface="paybooc OTF" pitchFamily="34" charset="-122"/>
-                <a:cs typeface="paybooc OTF" pitchFamily="34" charset="-120"/>
+                <a:latin typeface="Pretendard Light" pitchFamily="34" charset="0"/>
+                <a:ea typeface="Pretendard Light" pitchFamily="34" charset="-122"/>
+                <a:cs typeface="Pretendard Light" pitchFamily="34" charset="-120"/>
               </a:rPr>
               <a:t>저울추</a:t>
             </a:r>
@@ -6861,9 +6861,9 @@
                 <a:solidFill>
                   <a:srgbClr val="0C0A09"/>
                 </a:solidFill>
-                <a:latin typeface="paybooc OTF" pitchFamily="34" charset="0"/>
-                <a:ea typeface="paybooc OTF" pitchFamily="34" charset="-122"/>
-                <a:cs typeface="paybooc OTF" pitchFamily="34" charset="-120"/>
+                <a:latin typeface="Pretendard Light" pitchFamily="34" charset="0"/>
+                <a:ea typeface="Pretendard Light" pitchFamily="34" charset="-122"/>
+                <a:cs typeface="Pretendard Light" pitchFamily="34" charset="-120"/>
               </a:rPr>
               <a:t>넘치면 덜고</a:t>
             </a:r>
@@ -6974,9 +6974,9 @@
                 <a:solidFill>
                   <a:srgbClr val="777169"/>
                 </a:solidFill>
-                <a:latin typeface="paybooc OTF" pitchFamily="34" charset="0"/>
-                <a:ea typeface="paybooc OTF" pitchFamily="34" charset="-122"/>
-                <a:cs typeface="paybooc OTF" pitchFamily="34" charset="-120"/>
+                <a:latin typeface="Pretendard Light" pitchFamily="34" charset="0"/>
+                <a:ea typeface="Pretendard Light" pitchFamily="34" charset="-122"/>
+                <a:cs typeface="Pretendard Light" pitchFamily="34" charset="-120"/>
               </a:rPr>
               <a:t>실전 핵심</a:t>
             </a:r>
@@ -7012,9 +7012,9 @@
                 <a:solidFill>
                   <a:srgbClr val="0C0A09"/>
                 </a:solidFill>
-                <a:latin typeface="paybooc OTF" pitchFamily="34" charset="0"/>
-                <a:ea typeface="paybooc OTF" pitchFamily="34" charset="-122"/>
-                <a:cs typeface="paybooc OTF" pitchFamily="34" charset="-120"/>
+                <a:latin typeface="Pretendard Light" pitchFamily="34" charset="0"/>
+                <a:ea typeface="Pretendard Light" pitchFamily="34" charset="-122"/>
+                <a:cs typeface="Pretendard Light" pitchFamily="34" charset="-120"/>
               </a:rPr>
               <a:t>운의 나침반</a:t>
             </a:r>
@@ -7125,9 +7125,9 @@
                 <a:solidFill>
                   <a:srgbClr val="777169"/>
                 </a:solidFill>
-                <a:latin typeface="paybooc OTF" pitchFamily="34" charset="0"/>
-                <a:ea typeface="paybooc OTF" pitchFamily="34" charset="-122"/>
-                <a:cs typeface="paybooc OTF" pitchFamily="34" charset="-120"/>
+                <a:latin typeface="Pretendard Light" pitchFamily="34" charset="0"/>
+                <a:ea typeface="Pretendard Light" pitchFamily="34" charset="-122"/>
+                <a:cs typeface="Pretendard Light" pitchFamily="34" charset="-120"/>
               </a:rPr>
               <a:t>한마디</a:t>
             </a:r>
@@ -7380,9 +7380,9 @@
                 <a:solidFill>
                   <a:srgbClr val="0C0A09"/>
                 </a:solidFill>
-                <a:latin typeface="paybooc OTF" pitchFamily="34" charset="0"/>
-                <a:ea typeface="paybooc OTF" pitchFamily="34" charset="-122"/>
-                <a:cs typeface="paybooc OTF" pitchFamily="34" charset="-120"/>
+                <a:latin typeface="Pretendard Light" pitchFamily="34" charset="0"/>
+                <a:ea typeface="Pretendard Light" pitchFamily="34" charset="-122"/>
+                <a:cs typeface="Pretendard Light" pitchFamily="34" charset="-120"/>
               </a:rPr>
               <a:t>수수 사주교육</a:t>
             </a:r>
@@ -7418,9 +7418,9 @@
                 <a:solidFill>
                   <a:srgbClr val="777169"/>
                 </a:solidFill>
-                <a:latin typeface="paybooc OTF" pitchFamily="34" charset="0"/>
-                <a:ea typeface="paybooc OTF" pitchFamily="34" charset="-122"/>
-                <a:cs typeface="paybooc OTF" pitchFamily="34" charset="-120"/>
+                <a:latin typeface="Pretendard Light" pitchFamily="34" charset="0"/>
+                <a:ea typeface="Pretendard Light" pitchFamily="34" charset="-122"/>
+                <a:cs typeface="Pretendard Light" pitchFamily="34" charset="-120"/>
               </a:rPr>
               <a:t>STEP 3</a:t>
             </a:r>
@@ -7456,9 +7456,9 @@
                 <a:solidFill>
                   <a:srgbClr val="777169"/>
                 </a:solidFill>
-                <a:latin typeface="paybooc OTF" pitchFamily="34" charset="0"/>
-                <a:ea typeface="paybooc OTF" pitchFamily="34" charset="-122"/>
-                <a:cs typeface="paybooc OTF" pitchFamily="34" charset="-120"/>
+                <a:latin typeface="Pretendard Light" pitchFamily="34" charset="0"/>
+                <a:ea typeface="Pretendard Light" pitchFamily="34" charset="-122"/>
+                <a:cs typeface="Pretendard Light" pitchFamily="34" charset="-120"/>
               </a:rPr>
               <a:t>STEP 3 · 용신</a:t>
             </a:r>
@@ -7532,9 +7532,9 @@
                 <a:solidFill>
                   <a:srgbClr val="777169"/>
                 </a:solidFill>
-                <a:latin typeface="paybooc OTF" pitchFamily="34" charset="0"/>
-                <a:ea typeface="paybooc OTF" pitchFamily="34" charset="-122"/>
-                <a:cs typeface="paybooc OTF" pitchFamily="34" charset="-120"/>
+                <a:latin typeface="Pretendard Light" pitchFamily="34" charset="0"/>
+                <a:ea typeface="Pretendard Light" pitchFamily="34" charset="-122"/>
+                <a:cs typeface="Pretendard Light" pitchFamily="34" charset="-120"/>
               </a:rPr>
               <a:t>신강이면 덜고, 신약이면 채운다</a:t>
             </a:r>
@@ -7626,9 +7626,9 @@
                 <a:solidFill>
                   <a:srgbClr val="777169"/>
                 </a:solidFill>
-                <a:latin typeface="paybooc OTF" pitchFamily="34" charset="0"/>
-                <a:ea typeface="paybooc OTF" pitchFamily="34" charset="-122"/>
-                <a:cs typeface="paybooc OTF" pitchFamily="34" charset="-120"/>
+                <a:latin typeface="Pretendard Light" pitchFamily="34" charset="0"/>
+                <a:ea typeface="Pretendard Light" pitchFamily="34" charset="-122"/>
+                <a:cs typeface="Pretendard Light" pitchFamily="34" charset="-120"/>
               </a:rPr>
               <a:t>신강 사주</a:t>
             </a:r>
@@ -7664,9 +7664,9 @@
                 <a:solidFill>
                   <a:srgbClr val="0C0A09"/>
                 </a:solidFill>
-                <a:latin typeface="paybooc OTF" pitchFamily="34" charset="0"/>
-                <a:ea typeface="paybooc OTF" pitchFamily="34" charset="-122"/>
-                <a:cs typeface="paybooc OTF" pitchFamily="34" charset="-120"/>
+                <a:latin typeface="Pretendard Light" pitchFamily="34" charset="0"/>
+                <a:ea typeface="Pretendard Light" pitchFamily="34" charset="-122"/>
+                <a:cs typeface="Pretendard Light" pitchFamily="34" charset="-120"/>
               </a:rPr>
               <a:t>덜어낸다</a:t>
             </a:r>
@@ -7860,9 +7860,9 @@
                 <a:solidFill>
                   <a:srgbClr val="777169"/>
                 </a:solidFill>
-                <a:latin typeface="paybooc OTF" pitchFamily="34" charset="0"/>
-                <a:ea typeface="paybooc OTF" pitchFamily="34" charset="-122"/>
-                <a:cs typeface="paybooc OTF" pitchFamily="34" charset="-120"/>
+                <a:latin typeface="Pretendard Light" pitchFamily="34" charset="0"/>
+                <a:ea typeface="Pretendard Light" pitchFamily="34" charset="-122"/>
+                <a:cs typeface="Pretendard Light" pitchFamily="34" charset="-120"/>
               </a:rPr>
               <a:t>신약 사주</a:t>
             </a:r>
@@ -7898,9 +7898,9 @@
                 <a:solidFill>
                   <a:srgbClr val="0C0A09"/>
                 </a:solidFill>
-                <a:latin typeface="paybooc OTF" pitchFamily="34" charset="0"/>
-                <a:ea typeface="paybooc OTF" pitchFamily="34" charset="-122"/>
-                <a:cs typeface="paybooc OTF" pitchFamily="34" charset="-120"/>
+                <a:latin typeface="Pretendard Light" pitchFamily="34" charset="0"/>
+                <a:ea typeface="Pretendard Light" pitchFamily="34" charset="-122"/>
+                <a:cs typeface="Pretendard Light" pitchFamily="34" charset="-120"/>
               </a:rPr>
               <a:t>채운다</a:t>
             </a:r>
@@ -8072,9 +8072,9 @@
                 <a:solidFill>
                   <a:srgbClr val="777169"/>
                 </a:solidFill>
-                <a:latin typeface="paybooc OTF" pitchFamily="34" charset="0"/>
-                <a:ea typeface="paybooc OTF" pitchFamily="34" charset="-122"/>
-                <a:cs typeface="paybooc OTF" pitchFamily="34" charset="-120"/>
+                <a:latin typeface="Pretendard Light" pitchFamily="34" charset="0"/>
+                <a:ea typeface="Pretendard Light" pitchFamily="34" charset="-122"/>
+                <a:cs typeface="Pretendard Light" pitchFamily="34" charset="-120"/>
               </a:rPr>
               <a:t>억부 抑扶</a:t>
             </a:r>
@@ -8305,9 +8305,9 @@
                 <a:solidFill>
                   <a:srgbClr val="0C0A09"/>
                 </a:solidFill>
-                <a:latin typeface="paybooc OTF" pitchFamily="34" charset="0"/>
-                <a:ea typeface="paybooc OTF" pitchFamily="34" charset="-122"/>
-                <a:cs typeface="paybooc OTF" pitchFamily="34" charset="-120"/>
+                <a:latin typeface="Pretendard Light" pitchFamily="34" charset="0"/>
+                <a:ea typeface="Pretendard Light" pitchFamily="34" charset="-122"/>
+                <a:cs typeface="Pretendard Light" pitchFamily="34" charset="-120"/>
               </a:rPr>
               <a:t>수수 사주교육</a:t>
             </a:r>
@@ -8343,9 +8343,9 @@
                 <a:solidFill>
                   <a:srgbClr val="777169"/>
                 </a:solidFill>
-                <a:latin typeface="paybooc OTF" pitchFamily="34" charset="0"/>
-                <a:ea typeface="paybooc OTF" pitchFamily="34" charset="-122"/>
-                <a:cs typeface="paybooc OTF" pitchFamily="34" charset="-120"/>
+                <a:latin typeface="Pretendard Light" pitchFamily="34" charset="0"/>
+                <a:ea typeface="Pretendard Light" pitchFamily="34" charset="-122"/>
+                <a:cs typeface="Pretendard Light" pitchFamily="34" charset="-120"/>
               </a:rPr>
               <a:t>STEP 3</a:t>
             </a:r>
@@ -8381,9 +8381,9 @@
                 <a:solidFill>
                   <a:srgbClr val="777169"/>
                 </a:solidFill>
-                <a:latin typeface="paybooc OTF" pitchFamily="34" charset="0"/>
-                <a:ea typeface="paybooc OTF" pitchFamily="34" charset="-122"/>
-                <a:cs typeface="paybooc OTF" pitchFamily="34" charset="-120"/>
+                <a:latin typeface="Pretendard Light" pitchFamily="34" charset="0"/>
+                <a:ea typeface="Pretendard Light" pitchFamily="34" charset="-122"/>
+                <a:cs typeface="Pretendard Light" pitchFamily="34" charset="-120"/>
               </a:rPr>
               <a:t>STEP 3 · 용신</a:t>
             </a:r>
@@ -8457,9 +8457,9 @@
                 <a:solidFill>
                   <a:srgbClr val="777169"/>
                 </a:solidFill>
-                <a:latin typeface="paybooc OTF" pitchFamily="34" charset="0"/>
-                <a:ea typeface="paybooc OTF" pitchFamily="34" charset="-122"/>
-                <a:cs typeface="paybooc OTF" pitchFamily="34" charset="-120"/>
+                <a:latin typeface="Pretendard Light" pitchFamily="34" charset="0"/>
+                <a:ea typeface="Pretendard Light" pitchFamily="34" charset="-122"/>
+                <a:cs typeface="Pretendard Light" pitchFamily="34" charset="-120"/>
               </a:rPr>
               <a:t>용신을 돕는 편, 방해하는 편</a:t>
             </a:r>
@@ -8589,9 +8589,9 @@
                 <a:solidFill>
                   <a:srgbClr val="0C0A09"/>
                 </a:solidFill>
-                <a:latin typeface="paybooc OTF" pitchFamily="34" charset="0"/>
-                <a:ea typeface="paybooc OTF" pitchFamily="34" charset="-122"/>
-                <a:cs typeface="paybooc OTF" pitchFamily="34" charset="-120"/>
+                <a:latin typeface="Pretendard Light" pitchFamily="34" charset="0"/>
+                <a:ea typeface="Pretendard Light" pitchFamily="34" charset="-122"/>
+                <a:cs typeface="Pretendard Light" pitchFamily="34" charset="-120"/>
               </a:rPr>
               <a:t>용신(用神)</a:t>
             </a:r>
@@ -8762,9 +8762,9 @@
                 <a:solidFill>
                   <a:srgbClr val="0C0A09"/>
                 </a:solidFill>
-                <a:latin typeface="paybooc OTF" pitchFamily="34" charset="0"/>
-                <a:ea typeface="paybooc OTF" pitchFamily="34" charset="-122"/>
-                <a:cs typeface="paybooc OTF" pitchFamily="34" charset="-120"/>
+                <a:latin typeface="Pretendard Light" pitchFamily="34" charset="0"/>
+                <a:ea typeface="Pretendard Light" pitchFamily="34" charset="-122"/>
+                <a:cs typeface="Pretendard Light" pitchFamily="34" charset="-120"/>
               </a:rPr>
               <a:t>희신(喜神)</a:t>
             </a:r>
@@ -8935,9 +8935,9 @@
                 <a:solidFill>
                   <a:srgbClr val="0C0A09"/>
                 </a:solidFill>
-                <a:latin typeface="paybooc OTF" pitchFamily="34" charset="0"/>
-                <a:ea typeface="paybooc OTF" pitchFamily="34" charset="-122"/>
-                <a:cs typeface="paybooc OTF" pitchFamily="34" charset="-120"/>
+                <a:latin typeface="Pretendard Light" pitchFamily="34" charset="0"/>
+                <a:ea typeface="Pretendard Light" pitchFamily="34" charset="-122"/>
+                <a:cs typeface="Pretendard Light" pitchFamily="34" charset="-120"/>
               </a:rPr>
               <a:t>기신(忌神)</a:t>
             </a:r>
@@ -9048,9 +9048,9 @@
                 <a:solidFill>
                   <a:srgbClr val="777169"/>
                 </a:solidFill>
-                <a:latin typeface="paybooc OTF" pitchFamily="34" charset="0"/>
-                <a:ea typeface="paybooc OTF" pitchFamily="34" charset="-122"/>
-                <a:cs typeface="paybooc OTF" pitchFamily="34" charset="-120"/>
+                <a:latin typeface="Pretendard Light" pitchFamily="34" charset="0"/>
+                <a:ea typeface="Pretendard Light" pitchFamily="34" charset="-122"/>
+                <a:cs typeface="Pretendard Light" pitchFamily="34" charset="-120"/>
               </a:rPr>
               <a:t>운에 적용</a:t>
             </a:r>
@@ -9281,9 +9281,9 @@
                 <a:solidFill>
                   <a:srgbClr val="0C0A09"/>
                 </a:solidFill>
-                <a:latin typeface="paybooc OTF" pitchFamily="34" charset="0"/>
-                <a:ea typeface="paybooc OTF" pitchFamily="34" charset="-122"/>
-                <a:cs typeface="paybooc OTF" pitchFamily="34" charset="-120"/>
+                <a:latin typeface="Pretendard Light" pitchFamily="34" charset="0"/>
+                <a:ea typeface="Pretendard Light" pitchFamily="34" charset="-122"/>
+                <a:cs typeface="Pretendard Light" pitchFamily="34" charset="-120"/>
               </a:rPr>
               <a:t>수수 사주교육</a:t>
             </a:r>
@@ -9319,9 +9319,9 @@
                 <a:solidFill>
                   <a:srgbClr val="777169"/>
                 </a:solidFill>
-                <a:latin typeface="paybooc OTF" pitchFamily="34" charset="0"/>
-                <a:ea typeface="paybooc OTF" pitchFamily="34" charset="-122"/>
-                <a:cs typeface="paybooc OTF" pitchFamily="34" charset="-120"/>
+                <a:latin typeface="Pretendard Light" pitchFamily="34" charset="0"/>
+                <a:ea typeface="Pretendard Light" pitchFamily="34" charset="-122"/>
+                <a:cs typeface="Pretendard Light" pitchFamily="34" charset="-120"/>
               </a:rPr>
               <a:t>AGENDA</a:t>
             </a:r>
@@ -9357,9 +9357,9 @@
                 <a:solidFill>
                   <a:srgbClr val="777169"/>
                 </a:solidFill>
-                <a:latin typeface="paybooc OTF" pitchFamily="34" charset="0"/>
-                <a:ea typeface="paybooc OTF" pitchFamily="34" charset="-122"/>
-                <a:cs typeface="paybooc OTF" pitchFamily="34" charset="-120"/>
+                <a:latin typeface="Pretendard Light" pitchFamily="34" charset="0"/>
+                <a:ea typeface="Pretendard Light" pitchFamily="34" charset="-122"/>
+                <a:cs typeface="Pretendard Light" pitchFamily="34" charset="-120"/>
               </a:rPr>
               <a:t>COURSE OVERVIEW</a:t>
             </a:r>
@@ -9433,9 +9433,9 @@
                 <a:solidFill>
                   <a:srgbClr val="777169"/>
                 </a:solidFill>
-                <a:latin typeface="paybooc OTF" pitchFamily="34" charset="0"/>
-                <a:ea typeface="paybooc OTF" pitchFamily="34" charset="-122"/>
-                <a:cs typeface="paybooc OTF" pitchFamily="34" charset="-120"/>
+                <a:latin typeface="Pretendard Light" pitchFamily="34" charset="0"/>
+                <a:ea typeface="Pretendard Light" pitchFamily="34" charset="-122"/>
+                <a:cs typeface="Pretendard Light" pitchFamily="34" charset="-120"/>
               </a:rPr>
               <a:t>복잡한 사주를 푸는 4단계, 그리고 실습</a:t>
             </a:r>
@@ -9531,9 +9531,9 @@
                 <a:solidFill>
                   <a:srgbClr val="0C0A09"/>
                 </a:solidFill>
-                <a:latin typeface="paybooc OTF" pitchFamily="34" charset="0"/>
-                <a:ea typeface="paybooc OTF" pitchFamily="34" charset="-122"/>
-                <a:cs typeface="paybooc OTF" pitchFamily="34" charset="-120"/>
+                <a:latin typeface="Pretendard Light" pitchFamily="34" charset="0"/>
+                <a:ea typeface="Pretendard Light" pitchFamily="34" charset="-122"/>
+                <a:cs typeface="Pretendard Light" pitchFamily="34" charset="-120"/>
               </a:rPr>
               <a:t>STEP 1 — 일간과 월지</a:t>
             </a:r>
@@ -9690,9 +9690,9 @@
                 <a:solidFill>
                   <a:srgbClr val="0C0A09"/>
                 </a:solidFill>
-                <a:latin typeface="paybooc OTF" pitchFamily="34" charset="0"/>
-                <a:ea typeface="paybooc OTF" pitchFamily="34" charset="-122"/>
-                <a:cs typeface="paybooc OTF" pitchFamily="34" charset="-120"/>
+                <a:latin typeface="Pretendard Light" pitchFamily="34" charset="0"/>
+                <a:ea typeface="Pretendard Light" pitchFamily="34" charset="-122"/>
+                <a:cs typeface="Pretendard Light" pitchFamily="34" charset="-120"/>
               </a:rPr>
               <a:t>STEP 2 — 신강·신약</a:t>
             </a:r>
@@ -9849,9 +9849,9 @@
                 <a:solidFill>
                   <a:srgbClr val="0C0A09"/>
                 </a:solidFill>
-                <a:latin typeface="paybooc OTF" pitchFamily="34" charset="0"/>
-                <a:ea typeface="paybooc OTF" pitchFamily="34" charset="-122"/>
-                <a:cs typeface="paybooc OTF" pitchFamily="34" charset="-120"/>
+                <a:latin typeface="Pretendard Light" pitchFamily="34" charset="0"/>
+                <a:ea typeface="Pretendard Light" pitchFamily="34" charset="-122"/>
+                <a:cs typeface="Pretendard Light" pitchFamily="34" charset="-120"/>
               </a:rPr>
               <a:t>STEP 3 — 용신 찾기</a:t>
             </a:r>
@@ -10008,9 +10008,9 @@
                 <a:solidFill>
                   <a:srgbClr val="0C0A09"/>
                 </a:solidFill>
-                <a:latin typeface="paybooc OTF" pitchFamily="34" charset="0"/>
-                <a:ea typeface="paybooc OTF" pitchFamily="34" charset="-122"/>
-                <a:cs typeface="paybooc OTF" pitchFamily="34" charset="-120"/>
+                <a:latin typeface="Pretendard Light" pitchFamily="34" charset="0"/>
+                <a:ea typeface="Pretendard Light" pitchFamily="34" charset="-122"/>
+                <a:cs typeface="Pretendard Light" pitchFamily="34" charset="-120"/>
               </a:rPr>
               <a:t>STEP 4 — 종합 실습</a:t>
             </a:r>
@@ -10167,9 +10167,9 @@
                 <a:solidFill>
                   <a:srgbClr val="0C0A09"/>
                 </a:solidFill>
-                <a:latin typeface="paybooc OTF" pitchFamily="34" charset="0"/>
-                <a:ea typeface="paybooc OTF" pitchFamily="34" charset="-122"/>
-                <a:cs typeface="paybooc OTF" pitchFamily="34" charset="-120"/>
+                <a:latin typeface="Pretendard Light" pitchFamily="34" charset="0"/>
+                <a:ea typeface="Pretendard Light" pitchFamily="34" charset="-122"/>
+                <a:cs typeface="Pretendard Light" pitchFamily="34" charset="-120"/>
               </a:rPr>
               <a:t>전 과정 마무리</a:t>
             </a:r>
@@ -10397,9 +10397,9 @@
                 <a:solidFill>
                   <a:srgbClr val="0C0A09"/>
                 </a:solidFill>
-                <a:latin typeface="paybooc OTF" pitchFamily="34" charset="0"/>
-                <a:ea typeface="paybooc OTF" pitchFamily="34" charset="-122"/>
-                <a:cs typeface="paybooc OTF" pitchFamily="34" charset="-120"/>
+                <a:latin typeface="Pretendard Light" pitchFamily="34" charset="0"/>
+                <a:ea typeface="Pretendard Light" pitchFamily="34" charset="-122"/>
+                <a:cs typeface="Pretendard Light" pitchFamily="34" charset="-120"/>
               </a:rPr>
               <a:t>수수 사주교육</a:t>
             </a:r>
@@ -10435,9 +10435,9 @@
                 <a:solidFill>
                   <a:srgbClr val="777169"/>
                 </a:solidFill>
-                <a:latin typeface="paybooc OTF" pitchFamily="34" charset="0"/>
-                <a:ea typeface="paybooc OTF" pitchFamily="34" charset="-122"/>
-                <a:cs typeface="paybooc OTF" pitchFamily="34" charset="-120"/>
+                <a:latin typeface="Pretendard Light" pitchFamily="34" charset="0"/>
+                <a:ea typeface="Pretendard Light" pitchFamily="34" charset="-122"/>
+                <a:cs typeface="Pretendard Light" pitchFamily="34" charset="-120"/>
               </a:rPr>
               <a:t>STEP 3 · 실습</a:t>
             </a:r>
@@ -10473,9 +10473,9 @@
                 <a:solidFill>
                   <a:srgbClr val="777169"/>
                 </a:solidFill>
-                <a:latin typeface="paybooc OTF" pitchFamily="34" charset="0"/>
-                <a:ea typeface="paybooc OTF" pitchFamily="34" charset="-122"/>
-                <a:cs typeface="paybooc OTF" pitchFamily="34" charset="-120"/>
+                <a:latin typeface="Pretendard Light" pitchFamily="34" charset="0"/>
+                <a:ea typeface="Pretendard Light" pitchFamily="34" charset="-122"/>
+                <a:cs typeface="Pretendard Light" pitchFamily="34" charset="-120"/>
               </a:rPr>
               <a:t>STEP 3 · 실습</a:t>
             </a:r>
@@ -10549,9 +10549,9 @@
                 <a:solidFill>
                   <a:srgbClr val="777169"/>
                 </a:solidFill>
-                <a:latin typeface="paybooc OTF" pitchFamily="34" charset="0"/>
-                <a:ea typeface="paybooc OTF" pitchFamily="34" charset="-122"/>
-                <a:cs typeface="paybooc OTF" pitchFamily="34" charset="-120"/>
+                <a:latin typeface="Pretendard Light" pitchFamily="34" charset="0"/>
+                <a:ea typeface="Pretendard Light" pitchFamily="34" charset="-122"/>
+                <a:cs typeface="Pretendard Light" pitchFamily="34" charset="-120"/>
               </a:rPr>
               <a:t>신민규 님 명식 — 신강 金을 어떻게 풀까</a:t>
             </a:r>
@@ -10621,9 +10621,9 @@
                 <a:solidFill>
                   <a:srgbClr val="777169"/>
                 </a:solidFill>
-                <a:latin typeface="paybooc OTF" pitchFamily="34" charset="0"/>
-                <a:ea typeface="paybooc OTF" pitchFamily="34" charset="-122"/>
-                <a:cs typeface="paybooc OTF" pitchFamily="34" charset="-120"/>
+                <a:latin typeface="Pretendard Light" pitchFamily="34" charset="0"/>
+                <a:ea typeface="Pretendard Light" pitchFamily="34" charset="-122"/>
+                <a:cs typeface="Pretendard Light" pitchFamily="34" charset="-120"/>
               </a:rPr>
               <a:t>상태</a:t>
             </a:r>
@@ -10738,9 +10738,9 @@
                 <a:solidFill>
                   <a:srgbClr val="A8A29E"/>
                 </a:solidFill>
-                <a:latin typeface="paybooc OTF" pitchFamily="34" charset="0"/>
-                <a:ea typeface="paybooc OTF" pitchFamily="34" charset="-122"/>
-                <a:cs typeface="paybooc OTF" pitchFamily="34" charset="-120"/>
+                <a:latin typeface="Pretendard Light" pitchFamily="34" charset="0"/>
+                <a:ea typeface="Pretendard Light" pitchFamily="34" charset="-122"/>
+                <a:cs typeface="Pretendard Light" pitchFamily="34" charset="-120"/>
               </a:rPr>
               <a:t>→</a:t>
             </a:r>
@@ -10810,9 +10810,9 @@
                 <a:solidFill>
                   <a:srgbClr val="777169"/>
                 </a:solidFill>
-                <a:latin typeface="paybooc OTF" pitchFamily="34" charset="0"/>
-                <a:ea typeface="paybooc OTF" pitchFamily="34" charset="-122"/>
-                <a:cs typeface="paybooc OTF" pitchFamily="34" charset="-120"/>
+                <a:latin typeface="Pretendard Light" pitchFamily="34" charset="0"/>
+                <a:ea typeface="Pretendard Light" pitchFamily="34" charset="-122"/>
+                <a:cs typeface="Pretendard Light" pitchFamily="34" charset="-120"/>
               </a:rPr>
               <a:t>처방</a:t>
             </a:r>
@@ -10927,9 +10927,9 @@
                 <a:solidFill>
                   <a:srgbClr val="A8A29E"/>
                 </a:solidFill>
-                <a:latin typeface="paybooc OTF" pitchFamily="34" charset="0"/>
-                <a:ea typeface="paybooc OTF" pitchFamily="34" charset="-122"/>
-                <a:cs typeface="paybooc OTF" pitchFamily="34" charset="-120"/>
+                <a:latin typeface="Pretendard Light" pitchFamily="34" charset="0"/>
+                <a:ea typeface="Pretendard Light" pitchFamily="34" charset="-122"/>
+                <a:cs typeface="Pretendard Light" pitchFamily="34" charset="-120"/>
               </a:rPr>
               <a:t>→</a:t>
             </a:r>
@@ -10999,9 +10999,9 @@
                 <a:solidFill>
                   <a:srgbClr val="777169"/>
                 </a:solidFill>
-                <a:latin typeface="paybooc OTF" pitchFamily="34" charset="0"/>
-                <a:ea typeface="paybooc OTF" pitchFamily="34" charset="-122"/>
-                <a:cs typeface="paybooc OTF" pitchFamily="34" charset="-120"/>
+                <a:latin typeface="Pretendard Light" pitchFamily="34" charset="0"/>
+                <a:ea typeface="Pretendard Light" pitchFamily="34" charset="-122"/>
+                <a:cs typeface="Pretendard Light" pitchFamily="34" charset="-120"/>
               </a:rPr>
               <a:t>결론</a:t>
             </a:r>
@@ -11150,9 +11150,9 @@
                 <a:solidFill>
                   <a:srgbClr val="777169"/>
                 </a:solidFill>
-                <a:latin typeface="paybooc OTF" pitchFamily="34" charset="0"/>
-                <a:ea typeface="paybooc OTF" pitchFamily="34" charset="-122"/>
-                <a:cs typeface="paybooc OTF" pitchFamily="34" charset="-120"/>
+                <a:latin typeface="Pretendard Light" pitchFamily="34" charset="0"/>
+                <a:ea typeface="Pretendard Light" pitchFamily="34" charset="-122"/>
+                <a:cs typeface="Pretendard Light" pitchFamily="34" charset="-120"/>
               </a:rPr>
               <a:t>해석</a:t>
             </a:r>
@@ -11443,9 +11443,9 @@
                 <a:solidFill>
                   <a:srgbClr val="0C0A09"/>
                 </a:solidFill>
-                <a:latin typeface="paybooc OTF" pitchFamily="34" charset="0"/>
-                <a:ea typeface="paybooc OTF" pitchFamily="34" charset="-122"/>
-                <a:cs typeface="paybooc OTF" pitchFamily="34" charset="-120"/>
+                <a:latin typeface="Pretendard Light" pitchFamily="34" charset="0"/>
+                <a:ea typeface="Pretendard Light" pitchFamily="34" charset="-122"/>
+                <a:cs typeface="Pretendard Light" pitchFamily="34" charset="-120"/>
               </a:rPr>
               <a:t>수수 사주교육</a:t>
             </a:r>
@@ -11481,9 +11481,9 @@
                 <a:solidFill>
                   <a:srgbClr val="777169"/>
                 </a:solidFill>
-                <a:latin typeface="paybooc OTF" pitchFamily="34" charset="0"/>
-                <a:ea typeface="paybooc OTF" pitchFamily="34" charset="-122"/>
-                <a:cs typeface="paybooc OTF" pitchFamily="34" charset="-120"/>
+                <a:latin typeface="Pretendard Light" pitchFamily="34" charset="0"/>
+                <a:ea typeface="Pretendard Light" pitchFamily="34" charset="-122"/>
+                <a:cs typeface="Pretendard Light" pitchFamily="34" charset="-120"/>
               </a:rPr>
               <a:t>STEP 04</a:t>
             </a:r>
@@ -11519,9 +11519,9 @@
                 <a:solidFill>
                   <a:srgbClr val="777169"/>
                 </a:solidFill>
-                <a:latin typeface="paybooc OTF" pitchFamily="34" charset="0"/>
-                <a:ea typeface="paybooc OTF" pitchFamily="34" charset="-122"/>
-                <a:cs typeface="paybooc OTF" pitchFamily="34" charset="-120"/>
+                <a:latin typeface="Pretendard Light" pitchFamily="34" charset="0"/>
+                <a:ea typeface="Pretendard Light" pitchFamily="34" charset="-122"/>
+                <a:cs typeface="Pretendard Light" pitchFamily="34" charset="-120"/>
               </a:rPr>
               <a:t>STEP 04</a:t>
             </a:r>
@@ -11595,9 +11595,9 @@
                 <a:solidFill>
                   <a:srgbClr val="A8A29E"/>
                 </a:solidFill>
-                <a:latin typeface="paybooc OTF" pitchFamily="34" charset="0"/>
-                <a:ea typeface="paybooc OTF" pitchFamily="34" charset="-122"/>
-                <a:cs typeface="paybooc OTF" pitchFamily="34" charset="-120"/>
+                <a:latin typeface="Pretendard Light" pitchFamily="34" charset="0"/>
+                <a:ea typeface="Pretendard Light" pitchFamily="34" charset="-122"/>
+                <a:cs typeface="Pretendard Light" pitchFamily="34" charset="-120"/>
               </a:rPr>
               <a:t>READING IT ALL TOGETHER</a:t>
             </a:r>
@@ -11828,9 +11828,9 @@
                 <a:solidFill>
                   <a:srgbClr val="0C0A09"/>
                 </a:solidFill>
-                <a:latin typeface="paybooc OTF" pitchFamily="34" charset="0"/>
-                <a:ea typeface="paybooc OTF" pitchFamily="34" charset="-122"/>
-                <a:cs typeface="paybooc OTF" pitchFamily="34" charset="-120"/>
+                <a:latin typeface="Pretendard Light" pitchFamily="34" charset="0"/>
+                <a:ea typeface="Pretendard Light" pitchFamily="34" charset="-122"/>
+                <a:cs typeface="Pretendard Light" pitchFamily="34" charset="-120"/>
               </a:rPr>
               <a:t>수수 사주교육</a:t>
             </a:r>
@@ -11866,9 +11866,9 @@
                 <a:solidFill>
                   <a:srgbClr val="777169"/>
                 </a:solidFill>
-                <a:latin typeface="paybooc OTF" pitchFamily="34" charset="0"/>
-                <a:ea typeface="paybooc OTF" pitchFamily="34" charset="-122"/>
-                <a:cs typeface="paybooc OTF" pitchFamily="34" charset="-120"/>
+                <a:latin typeface="Pretendard Light" pitchFamily="34" charset="0"/>
+                <a:ea typeface="Pretendard Light" pitchFamily="34" charset="-122"/>
+                <a:cs typeface="Pretendard Light" pitchFamily="34" charset="-120"/>
               </a:rPr>
               <a:t>STEP 4 · 실습</a:t>
             </a:r>
@@ -11904,9 +11904,9 @@
                 <a:solidFill>
                   <a:srgbClr val="777169"/>
                 </a:solidFill>
-                <a:latin typeface="paybooc OTF" pitchFamily="34" charset="0"/>
-                <a:ea typeface="paybooc OTF" pitchFamily="34" charset="-122"/>
-                <a:cs typeface="paybooc OTF" pitchFamily="34" charset="-120"/>
+                <a:latin typeface="Pretendard Light" pitchFamily="34" charset="0"/>
+                <a:ea typeface="Pretendard Light" pitchFamily="34" charset="-122"/>
+                <a:cs typeface="Pretendard Light" pitchFamily="34" charset="-120"/>
               </a:rPr>
               <a:t>STEP 4 · 종합 실습</a:t>
             </a:r>
@@ -11980,9 +11980,9 @@
                 <a:solidFill>
                   <a:srgbClr val="777169"/>
                 </a:solidFill>
-                <a:latin typeface="paybooc OTF" pitchFamily="34" charset="0"/>
-                <a:ea typeface="paybooc OTF" pitchFamily="34" charset="-122"/>
-                <a:cs typeface="paybooc OTF" pitchFamily="34" charset="-120"/>
+                <a:latin typeface="Pretendard Light" pitchFamily="34" charset="0"/>
+                <a:ea typeface="Pretendard Light" pitchFamily="34" charset="-122"/>
+                <a:cs typeface="Pretendard Light" pitchFamily="34" charset="-120"/>
               </a:rPr>
               <a:t>신민규 · 남성 · 양력 1999.9.5 9시경</a:t>
             </a:r>
@@ -12052,9 +12052,9 @@
                 <a:solidFill>
                   <a:srgbClr val="777169"/>
                 </a:solidFill>
-                <a:latin typeface="paybooc OTF" pitchFamily="34" charset="0"/>
-                <a:ea typeface="paybooc OTF" pitchFamily="34" charset="-122"/>
-                <a:cs typeface="paybooc OTF" pitchFamily="34" charset="-120"/>
+                <a:latin typeface="Pretendard Light" pitchFamily="34" charset="0"/>
+                <a:ea typeface="Pretendard Light" pitchFamily="34" charset="-122"/>
+                <a:cs typeface="Pretendard Light" pitchFamily="34" charset="-120"/>
               </a:rPr>
               <a:t>시주</a:t>
             </a:r>
@@ -12320,9 +12320,9 @@
                 <a:solidFill>
                   <a:srgbClr val="0C0A09"/>
                 </a:solidFill>
-                <a:latin typeface="paybooc OTF" pitchFamily="34" charset="0"/>
-                <a:ea typeface="paybooc OTF" pitchFamily="34" charset="-122"/>
-                <a:cs typeface="paybooc OTF" pitchFamily="34" charset="-120"/>
+                <a:latin typeface="Pretendard Light" pitchFamily="34" charset="0"/>
+                <a:ea typeface="Pretendard Light" pitchFamily="34" charset="-122"/>
+                <a:cs typeface="Pretendard Light" pitchFamily="34" charset="-120"/>
               </a:rPr>
               <a:t>일주</a:t>
             </a:r>
@@ -12588,9 +12588,9 @@
                 <a:solidFill>
                   <a:srgbClr val="777169"/>
                 </a:solidFill>
-                <a:latin typeface="paybooc OTF" pitchFamily="34" charset="0"/>
-                <a:ea typeface="paybooc OTF" pitchFamily="34" charset="-122"/>
-                <a:cs typeface="paybooc OTF" pitchFamily="34" charset="-120"/>
+                <a:latin typeface="Pretendard Light" pitchFamily="34" charset="0"/>
+                <a:ea typeface="Pretendard Light" pitchFamily="34" charset="-122"/>
+                <a:cs typeface="Pretendard Light" pitchFamily="34" charset="-120"/>
               </a:rPr>
               <a:t>월주</a:t>
             </a:r>
@@ -12856,9 +12856,9 @@
                 <a:solidFill>
                   <a:srgbClr val="777169"/>
                 </a:solidFill>
-                <a:latin typeface="paybooc OTF" pitchFamily="34" charset="0"/>
-                <a:ea typeface="paybooc OTF" pitchFamily="34" charset="-122"/>
-                <a:cs typeface="paybooc OTF" pitchFamily="34" charset="-120"/>
+                <a:latin typeface="Pretendard Light" pitchFamily="34" charset="0"/>
+                <a:ea typeface="Pretendard Light" pitchFamily="34" charset="-122"/>
+                <a:cs typeface="Pretendard Light" pitchFamily="34" charset="-120"/>
               </a:rPr>
               <a:t>년주</a:t>
             </a:r>
@@ -13819,9 +13819,9 @@
                 <a:solidFill>
                   <a:srgbClr val="0C0A09"/>
                 </a:solidFill>
-                <a:latin typeface="paybooc OTF" pitchFamily="34" charset="0"/>
-                <a:ea typeface="paybooc OTF" pitchFamily="34" charset="-122"/>
-                <a:cs typeface="paybooc OTF" pitchFamily="34" charset="-120"/>
+                <a:latin typeface="Pretendard Light" pitchFamily="34" charset="0"/>
+                <a:ea typeface="Pretendard Light" pitchFamily="34" charset="-122"/>
+                <a:cs typeface="Pretendard Light" pitchFamily="34" charset="-120"/>
               </a:rPr>
               <a:t>수수 사주교육</a:t>
             </a:r>
@@ -13857,9 +13857,9 @@
                 <a:solidFill>
                   <a:srgbClr val="777169"/>
                 </a:solidFill>
-                <a:latin typeface="paybooc OTF" pitchFamily="34" charset="0"/>
-                <a:ea typeface="paybooc OTF" pitchFamily="34" charset="-122"/>
-                <a:cs typeface="paybooc OTF" pitchFamily="34" charset="-120"/>
+                <a:latin typeface="Pretendard Light" pitchFamily="34" charset="0"/>
+                <a:ea typeface="Pretendard Light" pitchFamily="34" charset="-122"/>
+                <a:cs typeface="Pretendard Light" pitchFamily="34" charset="-120"/>
               </a:rPr>
               <a:t>STEP 4 · 실습</a:t>
             </a:r>
@@ -13895,9 +13895,9 @@
                 <a:solidFill>
                   <a:srgbClr val="777169"/>
                 </a:solidFill>
-                <a:latin typeface="paybooc OTF" pitchFamily="34" charset="0"/>
-                <a:ea typeface="paybooc OTF" pitchFamily="34" charset="-122"/>
-                <a:cs typeface="paybooc OTF" pitchFamily="34" charset="-120"/>
+                <a:latin typeface="Pretendard Light" pitchFamily="34" charset="0"/>
+                <a:ea typeface="Pretendard Light" pitchFamily="34" charset="-122"/>
+                <a:cs typeface="Pretendard Light" pitchFamily="34" charset="-120"/>
               </a:rPr>
               <a:t>STEP 4 · 종합 실습</a:t>
             </a:r>
@@ -13971,9 +13971,9 @@
                 <a:solidFill>
                   <a:srgbClr val="777169"/>
                 </a:solidFill>
-                <a:latin typeface="paybooc OTF" pitchFamily="34" charset="0"/>
-                <a:ea typeface="paybooc OTF" pitchFamily="34" charset="-122"/>
-                <a:cs typeface="paybooc OTF" pitchFamily="34" charset="-120"/>
+                <a:latin typeface="Pretendard Light" pitchFamily="34" charset="0"/>
+                <a:ea typeface="Pretendard Light" pitchFamily="34" charset="-122"/>
+                <a:cs typeface="Pretendard Light" pitchFamily="34" charset="-120"/>
               </a:rPr>
               <a:t>신민규 님 명식을 순서대로</a:t>
             </a:r>
@@ -14069,9 +14069,9 @@
                 <a:solidFill>
                   <a:srgbClr val="0C0A09"/>
                 </a:solidFill>
-                <a:latin typeface="paybooc OTF" pitchFamily="34" charset="0"/>
-                <a:ea typeface="paybooc OTF" pitchFamily="34" charset="-122"/>
-                <a:cs typeface="paybooc OTF" pitchFamily="34" charset="-120"/>
+                <a:latin typeface="Pretendard Light" pitchFamily="34" charset="0"/>
+                <a:ea typeface="Pretendard Light" pitchFamily="34" charset="-122"/>
+                <a:cs typeface="Pretendard Light" pitchFamily="34" charset="-120"/>
               </a:rPr>
               <a:t>일간·월지 — 庚金 · 초가을(申)</a:t>
             </a:r>
@@ -14228,9 +14228,9 @@
                 <a:solidFill>
                   <a:srgbClr val="0C0A09"/>
                 </a:solidFill>
-                <a:latin typeface="paybooc OTF" pitchFamily="34" charset="0"/>
-                <a:ea typeface="paybooc OTF" pitchFamily="34" charset="-122"/>
-                <a:cs typeface="paybooc OTF" pitchFamily="34" charset="-120"/>
+                <a:latin typeface="Pretendard Light" pitchFamily="34" charset="0"/>
+                <a:ea typeface="Pretendard Light" pitchFamily="34" charset="-122"/>
+                <a:cs typeface="Pretendard Light" pitchFamily="34" charset="-120"/>
               </a:rPr>
               <a:t>신강·신약 — 신강</a:t>
             </a:r>
@@ -14387,9 +14387,9 @@
                 <a:solidFill>
                   <a:srgbClr val="0C0A09"/>
                 </a:solidFill>
-                <a:latin typeface="paybooc OTF" pitchFamily="34" charset="0"/>
-                <a:ea typeface="paybooc OTF" pitchFamily="34" charset="-122"/>
-                <a:cs typeface="paybooc OTF" pitchFamily="34" charset="-120"/>
+                <a:latin typeface="Pretendard Light" pitchFamily="34" charset="0"/>
+                <a:ea typeface="Pretendard Light" pitchFamily="34" charset="-122"/>
+                <a:cs typeface="Pretendard Light" pitchFamily="34" charset="-120"/>
               </a:rPr>
               <a:t>용신 — 水 (희신 金 · 기신 土)</a:t>
             </a:r>
@@ -14546,9 +14546,9 @@
                 <a:solidFill>
                   <a:srgbClr val="0C0A09"/>
                 </a:solidFill>
-                <a:latin typeface="paybooc OTF" pitchFamily="34" charset="0"/>
-                <a:ea typeface="paybooc OTF" pitchFamily="34" charset="-122"/>
-                <a:cs typeface="paybooc OTF" pitchFamily="34" charset="-120"/>
+                <a:latin typeface="Pretendard Light" pitchFamily="34" charset="0"/>
+                <a:ea typeface="Pretendard Light" pitchFamily="34" charset="-122"/>
+                <a:cs typeface="Pretendard Light" pitchFamily="34" charset="-120"/>
               </a:rPr>
               <a:t>대운 대입 — 시기 읽기</a:t>
             </a:r>
@@ -14776,9 +14776,9 @@
                 <a:solidFill>
                   <a:srgbClr val="0C0A09"/>
                 </a:solidFill>
-                <a:latin typeface="paybooc OTF" pitchFamily="34" charset="0"/>
-                <a:ea typeface="paybooc OTF" pitchFamily="34" charset="-122"/>
-                <a:cs typeface="paybooc OTF" pitchFamily="34" charset="-120"/>
+                <a:latin typeface="Pretendard Light" pitchFamily="34" charset="0"/>
+                <a:ea typeface="Pretendard Light" pitchFamily="34" charset="-122"/>
+                <a:cs typeface="Pretendard Light" pitchFamily="34" charset="-120"/>
               </a:rPr>
               <a:t>수수 사주교육</a:t>
             </a:r>
@@ -14814,9 +14814,9 @@
                 <a:solidFill>
                   <a:srgbClr val="777169"/>
                 </a:solidFill>
-                <a:latin typeface="paybooc OTF" pitchFamily="34" charset="0"/>
-                <a:ea typeface="paybooc OTF" pitchFamily="34" charset="-122"/>
-                <a:cs typeface="paybooc OTF" pitchFamily="34" charset="-120"/>
+                <a:latin typeface="Pretendard Light" pitchFamily="34" charset="0"/>
+                <a:ea typeface="Pretendard Light" pitchFamily="34" charset="-122"/>
+                <a:cs typeface="Pretendard Light" pitchFamily="34" charset="-120"/>
               </a:rPr>
               <a:t>STEP 4 · 실습</a:t>
             </a:r>
@@ -14852,9 +14852,9 @@
                 <a:solidFill>
                   <a:srgbClr val="777169"/>
                 </a:solidFill>
-                <a:latin typeface="paybooc OTF" pitchFamily="34" charset="0"/>
-                <a:ea typeface="paybooc OTF" pitchFamily="34" charset="-122"/>
-                <a:cs typeface="paybooc OTF" pitchFamily="34" charset="-120"/>
+                <a:latin typeface="Pretendard Light" pitchFamily="34" charset="0"/>
+                <a:ea typeface="Pretendard Light" pitchFamily="34" charset="-122"/>
+                <a:cs typeface="Pretendard Light" pitchFamily="34" charset="-120"/>
               </a:rPr>
               <a:t>STEP 4 · 종합 실습</a:t>
             </a:r>
@@ -14928,9 +14928,9 @@
                 <a:solidFill>
                   <a:srgbClr val="777169"/>
                 </a:solidFill>
-                <a:latin typeface="paybooc OTF" pitchFamily="34" charset="0"/>
-                <a:ea typeface="paybooc OTF" pitchFamily="34" charset="-122"/>
-                <a:cs typeface="paybooc OTF" pitchFamily="34" charset="-120"/>
+                <a:latin typeface="Pretendard Light" pitchFamily="34" charset="0"/>
+                <a:ea typeface="Pretendard Light" pitchFamily="34" charset="-122"/>
+                <a:cs typeface="Pretendard Light" pitchFamily="34" charset="-120"/>
               </a:rPr>
               <a:t>용신 水 · 희신 金의 눈으로 시기 읽기</a:t>
             </a:r>
@@ -15927,9 +15927,9 @@
                 <a:solidFill>
                   <a:srgbClr val="777169"/>
                 </a:solidFill>
-                <a:latin typeface="paybooc OTF" pitchFamily="34" charset="0"/>
-                <a:ea typeface="paybooc OTF" pitchFamily="34" charset="-122"/>
-                <a:cs typeface="paybooc OTF" pitchFamily="34" charset="-120"/>
+                <a:latin typeface="Pretendard Light" pitchFamily="34" charset="0"/>
+                <a:ea typeface="Pretendard Light" pitchFamily="34" charset="-122"/>
+                <a:cs typeface="Pretendard Light" pitchFamily="34" charset="-120"/>
               </a:rPr>
               <a:t>읽는 법</a:t>
             </a:r>
@@ -16217,9 +16217,9 @@
                 <a:solidFill>
                   <a:srgbClr val="0C0A09"/>
                 </a:solidFill>
-                <a:latin typeface="paybooc OTF" pitchFamily="34" charset="0"/>
-                <a:ea typeface="paybooc OTF" pitchFamily="34" charset="-122"/>
-                <a:cs typeface="paybooc OTF" pitchFamily="34" charset="-120"/>
+                <a:latin typeface="Pretendard Light" pitchFamily="34" charset="0"/>
+                <a:ea typeface="Pretendard Light" pitchFamily="34" charset="-122"/>
+                <a:cs typeface="Pretendard Light" pitchFamily="34" charset="-120"/>
               </a:rPr>
               <a:t>수수 사주교육</a:t>
             </a:r>
@@ -16255,9 +16255,9 @@
                 <a:solidFill>
                   <a:srgbClr val="777169"/>
                 </a:solidFill>
-                <a:latin typeface="paybooc OTF" pitchFamily="34" charset="0"/>
-                <a:ea typeface="paybooc OTF" pitchFamily="34" charset="-122"/>
-                <a:cs typeface="paybooc OTF" pitchFamily="34" charset="-120"/>
+                <a:latin typeface="Pretendard Light" pitchFamily="34" charset="0"/>
+                <a:ea typeface="Pretendard Light" pitchFamily="34" charset="-122"/>
+                <a:cs typeface="Pretendard Light" pitchFamily="34" charset="-120"/>
               </a:rPr>
               <a:t>REVIEW</a:t>
             </a:r>
@@ -16293,9 +16293,9 @@
                 <a:solidFill>
                   <a:srgbClr val="777169"/>
                 </a:solidFill>
-                <a:latin typeface="paybooc OTF" pitchFamily="34" charset="0"/>
-                <a:ea typeface="paybooc OTF" pitchFamily="34" charset="-122"/>
-                <a:cs typeface="paybooc OTF" pitchFamily="34" charset="-120"/>
+                <a:latin typeface="Pretendard Light" pitchFamily="34" charset="0"/>
+                <a:ea typeface="Pretendard Light" pitchFamily="34" charset="-122"/>
+                <a:cs typeface="Pretendard Light" pitchFamily="34" charset="-120"/>
               </a:rPr>
               <a:t>WRAP-UP</a:t>
             </a:r>
@@ -16369,9 +16369,9 @@
                 <a:solidFill>
                   <a:srgbClr val="777169"/>
                 </a:solidFill>
-                <a:latin typeface="paybooc OTF" pitchFamily="34" charset="0"/>
-                <a:ea typeface="paybooc OTF" pitchFamily="34" charset="-122"/>
-                <a:cs typeface="paybooc OTF" pitchFamily="34" charset="-120"/>
+                <a:latin typeface="Pretendard Light" pitchFamily="34" charset="0"/>
+                <a:ea typeface="Pretendard Light" pitchFamily="34" charset="-122"/>
+                <a:cs typeface="Pretendard Light" pitchFamily="34" charset="-120"/>
               </a:rPr>
               <a:t>이 순서만 지키면 어떤 사주도 푼다</a:t>
             </a:r>
@@ -16467,9 +16467,9 @@
                 <a:solidFill>
                   <a:srgbClr val="0C0A09"/>
                 </a:solidFill>
-                <a:latin typeface="paybooc OTF" pitchFamily="34" charset="0"/>
-                <a:ea typeface="paybooc OTF" pitchFamily="34" charset="-122"/>
-                <a:cs typeface="paybooc OTF" pitchFamily="34" charset="-120"/>
+                <a:latin typeface="Pretendard Light" pitchFamily="34" charset="0"/>
+                <a:ea typeface="Pretendard Light" pitchFamily="34" charset="-122"/>
+                <a:cs typeface="Pretendard Light" pitchFamily="34" charset="-120"/>
               </a:rPr>
               <a:t>일간 → 주인공 정하기</a:t>
             </a:r>
@@ -16626,9 +16626,9 @@
                 <a:solidFill>
                   <a:srgbClr val="0C0A09"/>
                 </a:solidFill>
-                <a:latin typeface="paybooc OTF" pitchFamily="34" charset="0"/>
-                <a:ea typeface="paybooc OTF" pitchFamily="34" charset="-122"/>
-                <a:cs typeface="paybooc OTF" pitchFamily="34" charset="-120"/>
+                <a:latin typeface="Pretendard Light" pitchFamily="34" charset="0"/>
+                <a:ea typeface="Pretendard Light" pitchFamily="34" charset="-122"/>
+                <a:cs typeface="Pretendard Light" pitchFamily="34" charset="-120"/>
               </a:rPr>
               <a:t>월지 → 계절·조후 보기</a:t>
             </a:r>
@@ -16785,9 +16785,9 @@
                 <a:solidFill>
                   <a:srgbClr val="0C0A09"/>
                 </a:solidFill>
-                <a:latin typeface="paybooc OTF" pitchFamily="34" charset="0"/>
-                <a:ea typeface="paybooc OTF" pitchFamily="34" charset="-122"/>
-                <a:cs typeface="paybooc OTF" pitchFamily="34" charset="-120"/>
+                <a:latin typeface="Pretendard Light" pitchFamily="34" charset="0"/>
+                <a:ea typeface="Pretendard Light" pitchFamily="34" charset="-122"/>
+                <a:cs typeface="Pretendard Light" pitchFamily="34" charset="-120"/>
               </a:rPr>
               <a:t>신강·신약 → 힘 재기</a:t>
             </a:r>
@@ -16944,9 +16944,9 @@
                 <a:solidFill>
                   <a:srgbClr val="0C0A09"/>
                 </a:solidFill>
-                <a:latin typeface="paybooc OTF" pitchFamily="34" charset="0"/>
-                <a:ea typeface="paybooc OTF" pitchFamily="34" charset="-122"/>
-                <a:cs typeface="paybooc OTF" pitchFamily="34" charset="-120"/>
+                <a:latin typeface="Pretendard Light" pitchFamily="34" charset="0"/>
+                <a:ea typeface="Pretendard Light" pitchFamily="34" charset="-122"/>
+                <a:cs typeface="Pretendard Light" pitchFamily="34" charset="-120"/>
               </a:rPr>
               <a:t>용신 → 열쇠 오행</a:t>
             </a:r>
@@ -17103,9 +17103,9 @@
                 <a:solidFill>
                   <a:srgbClr val="0C0A09"/>
                 </a:solidFill>
-                <a:latin typeface="paybooc OTF" pitchFamily="34" charset="0"/>
-                <a:ea typeface="paybooc OTF" pitchFamily="34" charset="-122"/>
-                <a:cs typeface="paybooc OTF" pitchFamily="34" charset="-120"/>
+                <a:latin typeface="Pretendard Light" pitchFamily="34" charset="0"/>
+                <a:ea typeface="Pretendard Light" pitchFamily="34" charset="-122"/>
+                <a:cs typeface="Pretendard Light" pitchFamily="34" charset="-120"/>
               </a:rPr>
               <a:t>대운 대입 → 시기 읽기</a:t>
             </a:r>
@@ -17377,9 +17377,9 @@
                 <a:solidFill>
                   <a:srgbClr val="FFFFFF"/>
                 </a:solidFill>
-                <a:latin typeface="paybooc OTF" pitchFamily="34" charset="0"/>
-                <a:ea typeface="paybooc OTF" pitchFamily="34" charset="-122"/>
-                <a:cs typeface="paybooc OTF" pitchFamily="34" charset="-120"/>
+                <a:latin typeface="Pretendard Light" pitchFamily="34" charset="0"/>
+                <a:ea typeface="Pretendard Light" pitchFamily="34" charset="-122"/>
+                <a:cs typeface="Pretendard Light" pitchFamily="34" charset="-120"/>
               </a:rPr>
               <a:t>수수 사주교육</a:t>
             </a:r>
@@ -17415,9 +17415,9 @@
                 <a:solidFill>
                   <a:srgbClr val="A8A29E"/>
                 </a:solidFill>
-                <a:latin typeface="paybooc OTF" pitchFamily="34" charset="0"/>
-                <a:ea typeface="paybooc OTF" pitchFamily="34" charset="-122"/>
-                <a:cs typeface="paybooc OTF" pitchFamily="34" charset="-120"/>
+                <a:latin typeface="Pretendard Light" pitchFamily="34" charset="0"/>
+                <a:ea typeface="Pretendard Light" pitchFamily="34" charset="-122"/>
+                <a:cs typeface="Pretendard Light" pitchFamily="34" charset="-120"/>
               </a:rPr>
               <a:t>COURSE COMPLETE</a:t>
             </a:r>
@@ -17453,9 +17453,9 @@
                 <a:solidFill>
                   <a:srgbClr val="A7E5D3"/>
                 </a:solidFill>
-                <a:latin typeface="paybooc OTF" pitchFamily="34" charset="0"/>
-                <a:ea typeface="paybooc OTF" pitchFamily="34" charset="-122"/>
-                <a:cs typeface="paybooc OTF" pitchFamily="34" charset="-120"/>
+                <a:latin typeface="Pretendard Light" pitchFamily="34" charset="0"/>
+                <a:ea typeface="Pretendard Light" pitchFamily="34" charset="-122"/>
+                <a:cs typeface="Pretendard Light" pitchFamily="34" charset="-120"/>
               </a:rPr>
               <a:t>전 3회차 완주</a:t>
             </a:r>
@@ -17529,9 +17529,9 @@
                 <a:solidFill>
                   <a:srgbClr val="A8A29E"/>
                 </a:solidFill>
-                <a:latin typeface="paybooc OTF" pitchFamily="34" charset="0"/>
-                <a:ea typeface="paybooc OTF" pitchFamily="34" charset="-122"/>
-                <a:cs typeface="paybooc OTF" pitchFamily="34" charset="-120"/>
+                <a:latin typeface="Pretendard Light" pitchFamily="34" charset="0"/>
+                <a:ea typeface="Pretendard Light" pitchFamily="34" charset="-122"/>
+                <a:cs typeface="Pretendard Light" pitchFamily="34" charset="-120"/>
               </a:rPr>
               <a:t>원국 → 대운·세운 → 4단계 리딩까지, 사주를 읽는 뼈대가 완성됐습니다</a:t>
             </a:r>
@@ -17632,9 +17632,9 @@
                 <a:solidFill>
                   <a:srgbClr val="FFFFFF"/>
                 </a:solidFill>
-                <a:latin typeface="paybooc OTF" pitchFamily="34" charset="0"/>
-                <a:ea typeface="paybooc OTF" pitchFamily="34" charset="-122"/>
-                <a:cs typeface="paybooc OTF" pitchFamily="34" charset="-120"/>
+                <a:latin typeface="Pretendard Light" pitchFamily="34" charset="0"/>
+                <a:ea typeface="Pretendard Light" pitchFamily="34" charset="-122"/>
+                <a:cs typeface="Pretendard Light" pitchFamily="34" charset="-120"/>
               </a:rPr>
               <a:t>1회차 · 원국</a:t>
             </a:r>
@@ -17773,9 +17773,9 @@
                 <a:solidFill>
                   <a:srgbClr val="FFFFFF"/>
                 </a:solidFill>
-                <a:latin typeface="paybooc OTF" pitchFamily="34" charset="0"/>
-                <a:ea typeface="paybooc OTF" pitchFamily="34" charset="-122"/>
-                <a:cs typeface="paybooc OTF" pitchFamily="34" charset="-120"/>
+                <a:latin typeface="Pretendard Light" pitchFamily="34" charset="0"/>
+                <a:ea typeface="Pretendard Light" pitchFamily="34" charset="-122"/>
+                <a:cs typeface="Pretendard Light" pitchFamily="34" charset="-120"/>
               </a:rPr>
               <a:t>2회차 · 대운·세운</a:t>
             </a:r>
@@ -17914,9 +17914,9 @@
                 <a:solidFill>
                   <a:srgbClr val="FFFFFF"/>
                 </a:solidFill>
-                <a:latin typeface="paybooc OTF" pitchFamily="34" charset="0"/>
-                <a:ea typeface="paybooc OTF" pitchFamily="34" charset="-122"/>
-                <a:cs typeface="paybooc OTF" pitchFamily="34" charset="-120"/>
+                <a:latin typeface="Pretendard Light" pitchFamily="34" charset="0"/>
+                <a:ea typeface="Pretendard Light" pitchFamily="34" charset="-122"/>
+                <a:cs typeface="Pretendard Light" pitchFamily="34" charset="-120"/>
               </a:rPr>
               <a:t>3회차 · 리딩</a:t>
             </a:r>
@@ -18166,9 +18166,9 @@
                 <a:solidFill>
                   <a:srgbClr val="0C0A09"/>
                 </a:solidFill>
-                <a:latin typeface="paybooc OTF" pitchFamily="34" charset="0"/>
-                <a:ea typeface="paybooc OTF" pitchFamily="34" charset="-122"/>
-                <a:cs typeface="paybooc OTF" pitchFamily="34" charset="-120"/>
+                <a:latin typeface="Pretendard Light" pitchFamily="34" charset="0"/>
+                <a:ea typeface="Pretendard Light" pitchFamily="34" charset="-122"/>
+                <a:cs typeface="Pretendard Light" pitchFamily="34" charset="-120"/>
               </a:rPr>
               <a:t>수수 사주교육</a:t>
             </a:r>
@@ -18204,9 +18204,9 @@
                 <a:solidFill>
                   <a:srgbClr val="777169"/>
                 </a:solidFill>
-                <a:latin typeface="paybooc OTF" pitchFamily="34" charset="0"/>
-                <a:ea typeface="paybooc OTF" pitchFamily="34" charset="-122"/>
-                <a:cs typeface="paybooc OTF" pitchFamily="34" charset="-120"/>
+                <a:latin typeface="Pretendard Light" pitchFamily="34" charset="0"/>
+                <a:ea typeface="Pretendard Light" pitchFamily="34" charset="-122"/>
+                <a:cs typeface="Pretendard Light" pitchFamily="34" charset="-120"/>
               </a:rPr>
               <a:t>GOALS</a:t>
             </a:r>
@@ -18242,9 +18242,9 @@
                 <a:solidFill>
                   <a:srgbClr val="777169"/>
                 </a:solidFill>
-                <a:latin typeface="paybooc OTF" pitchFamily="34" charset="0"/>
-                <a:ea typeface="paybooc OTF" pitchFamily="34" charset="-122"/>
-                <a:cs typeface="paybooc OTF" pitchFamily="34" charset="-120"/>
+                <a:latin typeface="Pretendard Light" pitchFamily="34" charset="0"/>
+                <a:ea typeface="Pretendard Light" pitchFamily="34" charset="-122"/>
+                <a:cs typeface="Pretendard Light" pitchFamily="34" charset="-120"/>
               </a:rPr>
               <a:t>LEARNING GOALS</a:t>
             </a:r>
@@ -18318,9 +18318,9 @@
                 <a:solidFill>
                   <a:srgbClr val="777169"/>
                 </a:solidFill>
-                <a:latin typeface="paybooc OTF" pitchFamily="34" charset="0"/>
-                <a:ea typeface="paybooc OTF" pitchFamily="34" charset="-122"/>
-                <a:cs typeface="paybooc OTF" pitchFamily="34" charset="-120"/>
+                <a:latin typeface="Pretendard Light" pitchFamily="34" charset="0"/>
+                <a:ea typeface="Pretendard Light" pitchFamily="34" charset="-122"/>
+                <a:cs typeface="Pretendard Light" pitchFamily="34" charset="-120"/>
               </a:rPr>
               <a:t>복잡한 사주 앞에서도 당황하지 않기</a:t>
             </a:r>
@@ -18450,9 +18450,9 @@
                 <a:solidFill>
                   <a:srgbClr val="0C0A09"/>
                 </a:solidFill>
-                <a:latin typeface="paybooc OTF" pitchFamily="34" charset="0"/>
-                <a:ea typeface="paybooc OTF" pitchFamily="34" charset="-122"/>
-                <a:cs typeface="paybooc OTF" pitchFamily="34" charset="-120"/>
+                <a:latin typeface="Pretendard Light" pitchFamily="34" charset="0"/>
+                <a:ea typeface="Pretendard Light" pitchFamily="34" charset="-122"/>
+                <a:cs typeface="Pretendard Light" pitchFamily="34" charset="-120"/>
               </a:rPr>
               <a:t>순서로 푼다</a:t>
             </a:r>
@@ -18623,9 +18623,9 @@
                 <a:solidFill>
                   <a:srgbClr val="0C0A09"/>
                 </a:solidFill>
-                <a:latin typeface="paybooc OTF" pitchFamily="34" charset="0"/>
-                <a:ea typeface="paybooc OTF" pitchFamily="34" charset="-122"/>
-                <a:cs typeface="paybooc OTF" pitchFamily="34" charset="-120"/>
+                <a:latin typeface="Pretendard Light" pitchFamily="34" charset="0"/>
+                <a:ea typeface="Pretendard Light" pitchFamily="34" charset="-122"/>
+                <a:cs typeface="Pretendard Light" pitchFamily="34" charset="-120"/>
               </a:rPr>
               <a:t>용신까지 도달</a:t>
             </a:r>
@@ -18796,9 +18796,9 @@
                 <a:solidFill>
                   <a:srgbClr val="0C0A09"/>
                 </a:solidFill>
-                <a:latin typeface="paybooc OTF" pitchFamily="34" charset="0"/>
-                <a:ea typeface="paybooc OTF" pitchFamily="34" charset="-122"/>
-                <a:cs typeface="paybooc OTF" pitchFamily="34" charset="-120"/>
+                <a:latin typeface="Pretendard Light" pitchFamily="34" charset="0"/>
+                <a:ea typeface="Pretendard Light" pitchFamily="34" charset="-122"/>
+                <a:cs typeface="Pretendard Light" pitchFamily="34" charset="-120"/>
               </a:rPr>
               <a:t>직접 리딩</a:t>
             </a:r>
@@ -18909,9 +18909,9 @@
                 <a:solidFill>
                   <a:srgbClr val="777169"/>
                 </a:solidFill>
-                <a:latin typeface="paybooc OTF" pitchFamily="34" charset="0"/>
-                <a:ea typeface="paybooc OTF" pitchFamily="34" charset="-122"/>
-                <a:cs typeface="paybooc OTF" pitchFamily="34" charset="-120"/>
+                <a:latin typeface="Pretendard Light" pitchFamily="34" charset="0"/>
+                <a:ea typeface="Pretendard Light" pitchFamily="34" charset="-122"/>
+                <a:cs typeface="Pretendard Light" pitchFamily="34" charset="-120"/>
               </a:rPr>
               <a:t>한 줄 요약</a:t>
             </a:r>
@@ -19142,9 +19142,9 @@
                 <a:solidFill>
                   <a:srgbClr val="0C0A09"/>
                 </a:solidFill>
-                <a:latin typeface="paybooc OTF" pitchFamily="34" charset="0"/>
-                <a:ea typeface="paybooc OTF" pitchFamily="34" charset="-122"/>
-                <a:cs typeface="paybooc OTF" pitchFamily="34" charset="-120"/>
+                <a:latin typeface="Pretendard Light" pitchFamily="34" charset="0"/>
+                <a:ea typeface="Pretendard Light" pitchFamily="34" charset="-122"/>
+                <a:cs typeface="Pretendard Light" pitchFamily="34" charset="-120"/>
               </a:rPr>
               <a:t>수수 사주교육</a:t>
             </a:r>
@@ -19180,9 +19180,9 @@
                 <a:solidFill>
                   <a:srgbClr val="777169"/>
                 </a:solidFill>
-                <a:latin typeface="paybooc OTF" pitchFamily="34" charset="0"/>
-                <a:ea typeface="paybooc OTF" pitchFamily="34" charset="-122"/>
-                <a:cs typeface="paybooc OTF" pitchFamily="34" charset="-120"/>
+                <a:latin typeface="Pretendard Light" pitchFamily="34" charset="0"/>
+                <a:ea typeface="Pretendard Light" pitchFamily="34" charset="-122"/>
+                <a:cs typeface="Pretendard Light" pitchFamily="34" charset="-120"/>
               </a:rPr>
               <a:t>RECAP · 1·2회차</a:t>
             </a:r>
@@ -19218,9 +19218,9 @@
                 <a:solidFill>
                   <a:srgbClr val="777169"/>
                 </a:solidFill>
-                <a:latin typeface="paybooc OTF" pitchFamily="34" charset="0"/>
-                <a:ea typeface="paybooc OTF" pitchFamily="34" charset="-122"/>
-                <a:cs typeface="paybooc OTF" pitchFamily="34" charset="-120"/>
+                <a:latin typeface="Pretendard Light" pitchFamily="34" charset="0"/>
+                <a:ea typeface="Pretendard Light" pitchFamily="34" charset="-122"/>
+                <a:cs typeface="Pretendard Light" pitchFamily="34" charset="-120"/>
               </a:rPr>
               <a:t>BRIDGE FROM SESSION 01·02</a:t>
             </a:r>
@@ -19294,9 +19294,9 @@
                 <a:solidFill>
                   <a:srgbClr val="777169"/>
                 </a:solidFill>
-                <a:latin typeface="paybooc OTF" pitchFamily="34" charset="0"/>
-                <a:ea typeface="paybooc OTF" pitchFamily="34" charset="-122"/>
-                <a:cs typeface="paybooc OTF" pitchFamily="34" charset="-120"/>
+                <a:latin typeface="Pretendard Light" pitchFamily="34" charset="0"/>
+                <a:ea typeface="Pretendard Light" pitchFamily="34" charset="-122"/>
+                <a:cs typeface="Pretendard Light" pitchFamily="34" charset="-120"/>
               </a:rPr>
               <a:t>원국과 운, 이제 “푸는 순서”</a:t>
             </a:r>
@@ -19366,9 +19366,9 @@
                 <a:solidFill>
                   <a:srgbClr val="777169"/>
                 </a:solidFill>
-                <a:latin typeface="paybooc OTF" pitchFamily="34" charset="0"/>
-                <a:ea typeface="paybooc OTF" pitchFamily="34" charset="-122"/>
-                <a:cs typeface="paybooc OTF" pitchFamily="34" charset="-120"/>
+                <a:latin typeface="Pretendard Light" pitchFamily="34" charset="0"/>
+                <a:ea typeface="Pretendard Light" pitchFamily="34" charset="-122"/>
+                <a:cs typeface="Pretendard Light" pitchFamily="34" charset="-120"/>
               </a:rPr>
               <a:t>1회차</a:t>
             </a:r>
@@ -19404,9 +19404,9 @@
                 <a:solidFill>
                   <a:srgbClr val="0C0A09"/>
                 </a:solidFill>
-                <a:latin typeface="paybooc OTF" pitchFamily="34" charset="0"/>
-                <a:ea typeface="paybooc OTF" pitchFamily="34" charset="-122"/>
-                <a:cs typeface="paybooc OTF" pitchFamily="34" charset="-120"/>
+                <a:latin typeface="Pretendard Light" pitchFamily="34" charset="0"/>
+                <a:ea typeface="Pretendard Light" pitchFamily="34" charset="-122"/>
+                <a:cs typeface="Pretendard Light" pitchFamily="34" charset="-120"/>
               </a:rPr>
               <a:t>원국(原局)</a:t>
             </a:r>
@@ -19517,9 +19517,9 @@
                 <a:solidFill>
                   <a:srgbClr val="777169"/>
                 </a:solidFill>
-                <a:latin typeface="paybooc OTF" pitchFamily="34" charset="0"/>
-                <a:ea typeface="paybooc OTF" pitchFamily="34" charset="-122"/>
-                <a:cs typeface="paybooc OTF" pitchFamily="34" charset="-120"/>
+                <a:latin typeface="Pretendard Light" pitchFamily="34" charset="0"/>
+                <a:ea typeface="Pretendard Light" pitchFamily="34" charset="-122"/>
+                <a:cs typeface="Pretendard Light" pitchFamily="34" charset="-120"/>
               </a:rPr>
               <a:t>2회차</a:t>
             </a:r>
@@ -19555,9 +19555,9 @@
                 <a:solidFill>
                   <a:srgbClr val="0C0A09"/>
                 </a:solidFill>
-                <a:latin typeface="paybooc OTF" pitchFamily="34" charset="0"/>
-                <a:ea typeface="paybooc OTF" pitchFamily="34" charset="-122"/>
-                <a:cs typeface="paybooc OTF" pitchFamily="34" charset="-120"/>
+                <a:latin typeface="Pretendard Light" pitchFamily="34" charset="0"/>
+                <a:ea typeface="Pretendard Light" pitchFamily="34" charset="-122"/>
+                <a:cs typeface="Pretendard Light" pitchFamily="34" charset="-120"/>
               </a:rPr>
               <a:t>대운·세운</a:t>
             </a:r>
@@ -19668,9 +19668,9 @@
                 <a:solidFill>
                   <a:srgbClr val="777169"/>
                 </a:solidFill>
-                <a:latin typeface="paybooc OTF" pitchFamily="34" charset="0"/>
-                <a:ea typeface="paybooc OTF" pitchFamily="34" charset="-122"/>
-                <a:cs typeface="paybooc OTF" pitchFamily="34" charset="-120"/>
+                <a:latin typeface="Pretendard Light" pitchFamily="34" charset="0"/>
+                <a:ea typeface="Pretendard Light" pitchFamily="34" charset="-122"/>
+                <a:cs typeface="Pretendard Light" pitchFamily="34" charset="-120"/>
               </a:rPr>
               <a:t>3회차</a:t>
             </a:r>
@@ -19706,9 +19706,9 @@
                 <a:solidFill>
                   <a:srgbClr val="0C0A09"/>
                 </a:solidFill>
-                <a:latin typeface="paybooc OTF" pitchFamily="34" charset="0"/>
-                <a:ea typeface="paybooc OTF" pitchFamily="34" charset="-122"/>
-                <a:cs typeface="paybooc OTF" pitchFamily="34" charset="-120"/>
+                <a:latin typeface="Pretendard Light" pitchFamily="34" charset="0"/>
+                <a:ea typeface="Pretendard Light" pitchFamily="34" charset="-122"/>
+                <a:cs typeface="Pretendard Light" pitchFamily="34" charset="-120"/>
               </a:rPr>
               <a:t>리딩 프로세스</a:t>
             </a:r>
@@ -19819,9 +19819,9 @@
                 <a:solidFill>
                   <a:srgbClr val="777169"/>
                 </a:solidFill>
-                <a:latin typeface="paybooc OTF" pitchFamily="34" charset="0"/>
-                <a:ea typeface="paybooc OTF" pitchFamily="34" charset="-122"/>
-                <a:cs typeface="paybooc OTF" pitchFamily="34" charset="-120"/>
+                <a:latin typeface="Pretendard Light" pitchFamily="34" charset="0"/>
+                <a:ea typeface="Pretendard Light" pitchFamily="34" charset="-122"/>
+                <a:cs typeface="Pretendard Light" pitchFamily="34" charset="-120"/>
               </a:rPr>
               <a:t>오늘</a:t>
             </a:r>
@@ -20052,9 +20052,9 @@
                 <a:solidFill>
                   <a:srgbClr val="0C0A09"/>
                 </a:solidFill>
-                <a:latin typeface="paybooc OTF" pitchFamily="34" charset="0"/>
-                <a:ea typeface="paybooc OTF" pitchFamily="34" charset="-122"/>
-                <a:cs typeface="paybooc OTF" pitchFamily="34" charset="-120"/>
+                <a:latin typeface="Pretendard Light" pitchFamily="34" charset="0"/>
+                <a:ea typeface="Pretendard Light" pitchFamily="34" charset="-122"/>
+                <a:cs typeface="Pretendard Light" pitchFamily="34" charset="-120"/>
               </a:rPr>
               <a:t>수수 사주교육</a:t>
             </a:r>
@@ -20090,9 +20090,9 @@
                 <a:solidFill>
                   <a:srgbClr val="777169"/>
                 </a:solidFill>
-                <a:latin typeface="paybooc OTF" pitchFamily="34" charset="0"/>
-                <a:ea typeface="paybooc OTF" pitchFamily="34" charset="-122"/>
-                <a:cs typeface="paybooc OTF" pitchFamily="34" charset="-120"/>
+                <a:latin typeface="Pretendard Light" pitchFamily="34" charset="0"/>
+                <a:ea typeface="Pretendard Light" pitchFamily="34" charset="-122"/>
+                <a:cs typeface="Pretendard Light" pitchFamily="34" charset="-120"/>
               </a:rPr>
               <a:t>CORE</a:t>
             </a:r>
@@ -20128,9 +20128,9 @@
                 <a:solidFill>
                   <a:srgbClr val="777169"/>
                 </a:solidFill>
-                <a:latin typeface="paybooc OTF" pitchFamily="34" charset="0"/>
-                <a:ea typeface="paybooc OTF" pitchFamily="34" charset="-122"/>
-                <a:cs typeface="paybooc OTF" pitchFamily="34" charset="-120"/>
+                <a:latin typeface="Pretendard Light" pitchFamily="34" charset="0"/>
+                <a:ea typeface="Pretendard Light" pitchFamily="34" charset="-122"/>
+                <a:cs typeface="Pretendard Light" pitchFamily="34" charset="-120"/>
               </a:rPr>
               <a:t>THE 4-STEP PROCESS</a:t>
             </a:r>
@@ -20204,9 +20204,9 @@
                 <a:solidFill>
                   <a:srgbClr val="777169"/>
                 </a:solidFill>
-                <a:latin typeface="paybooc OTF" pitchFamily="34" charset="0"/>
-                <a:ea typeface="paybooc OTF" pitchFamily="34" charset="-122"/>
-                <a:cs typeface="paybooc OTF" pitchFamily="34" charset="-120"/>
+                <a:latin typeface="Pretendard Light" pitchFamily="34" charset="0"/>
+                <a:ea typeface="Pretendard Light" pitchFamily="34" charset="-122"/>
+                <a:cs typeface="Pretendard Light" pitchFamily="34" charset="-120"/>
               </a:rPr>
               <a:t>가장 중요한 뼈대 — 이 순서를 외우세요</a:t>
             </a:r>
@@ -20276,9 +20276,9 @@
                 <a:solidFill>
                   <a:srgbClr val="777169"/>
                 </a:solidFill>
-                <a:latin typeface="paybooc OTF" pitchFamily="34" charset="0"/>
-                <a:ea typeface="paybooc OTF" pitchFamily="34" charset="-122"/>
-                <a:cs typeface="paybooc OTF" pitchFamily="34" charset="-120"/>
+                <a:latin typeface="Pretendard Light" pitchFamily="34" charset="0"/>
+                <a:ea typeface="Pretendard Light" pitchFamily="34" charset="-122"/>
+                <a:cs typeface="Pretendard Light" pitchFamily="34" charset="-120"/>
               </a:rPr>
               <a:t>STEP 1</a:t>
             </a:r>
@@ -20393,9 +20393,9 @@
                 <a:solidFill>
                   <a:srgbClr val="A8A29E"/>
                 </a:solidFill>
-                <a:latin typeface="paybooc OTF" pitchFamily="34" charset="0"/>
-                <a:ea typeface="paybooc OTF" pitchFamily="34" charset="-122"/>
-                <a:cs typeface="paybooc OTF" pitchFamily="34" charset="-120"/>
+                <a:latin typeface="Pretendard Light" pitchFamily="34" charset="0"/>
+                <a:ea typeface="Pretendard Light" pitchFamily="34" charset="-122"/>
+                <a:cs typeface="Pretendard Light" pitchFamily="34" charset="-120"/>
               </a:rPr>
               <a:t>→</a:t>
             </a:r>
@@ -20465,9 +20465,9 @@
                 <a:solidFill>
                   <a:srgbClr val="777169"/>
                 </a:solidFill>
-                <a:latin typeface="paybooc OTF" pitchFamily="34" charset="0"/>
-                <a:ea typeface="paybooc OTF" pitchFamily="34" charset="-122"/>
-                <a:cs typeface="paybooc OTF" pitchFamily="34" charset="-120"/>
+                <a:latin typeface="Pretendard Light" pitchFamily="34" charset="0"/>
+                <a:ea typeface="Pretendard Light" pitchFamily="34" charset="-122"/>
+                <a:cs typeface="Pretendard Light" pitchFamily="34" charset="-120"/>
               </a:rPr>
               <a:t>STEP 2</a:t>
             </a:r>
@@ -20582,9 +20582,9 @@
                 <a:solidFill>
                   <a:srgbClr val="A8A29E"/>
                 </a:solidFill>
-                <a:latin typeface="paybooc OTF" pitchFamily="34" charset="0"/>
-                <a:ea typeface="paybooc OTF" pitchFamily="34" charset="-122"/>
-                <a:cs typeface="paybooc OTF" pitchFamily="34" charset="-120"/>
+                <a:latin typeface="Pretendard Light" pitchFamily="34" charset="0"/>
+                <a:ea typeface="Pretendard Light" pitchFamily="34" charset="-122"/>
+                <a:cs typeface="Pretendard Light" pitchFamily="34" charset="-120"/>
               </a:rPr>
               <a:t>→</a:t>
             </a:r>
@@ -20654,9 +20654,9 @@
                 <a:solidFill>
                   <a:srgbClr val="777169"/>
                 </a:solidFill>
-                <a:latin typeface="paybooc OTF" pitchFamily="34" charset="0"/>
-                <a:ea typeface="paybooc OTF" pitchFamily="34" charset="-122"/>
-                <a:cs typeface="paybooc OTF" pitchFamily="34" charset="-120"/>
+                <a:latin typeface="Pretendard Light" pitchFamily="34" charset="0"/>
+                <a:ea typeface="Pretendard Light" pitchFamily="34" charset="-122"/>
+                <a:cs typeface="Pretendard Light" pitchFamily="34" charset="-120"/>
               </a:rPr>
               <a:t>STEP 3</a:t>
             </a:r>
@@ -20771,9 +20771,9 @@
                 <a:solidFill>
                   <a:srgbClr val="A8A29E"/>
                 </a:solidFill>
-                <a:latin typeface="paybooc OTF" pitchFamily="34" charset="0"/>
-                <a:ea typeface="paybooc OTF" pitchFamily="34" charset="-122"/>
-                <a:cs typeface="paybooc OTF" pitchFamily="34" charset="-120"/>
+                <a:latin typeface="Pretendard Light" pitchFamily="34" charset="0"/>
+                <a:ea typeface="Pretendard Light" pitchFamily="34" charset="-122"/>
+                <a:cs typeface="Pretendard Light" pitchFamily="34" charset="-120"/>
               </a:rPr>
               <a:t>→</a:t>
             </a:r>
@@ -20843,9 +20843,9 @@
                 <a:solidFill>
                   <a:srgbClr val="777169"/>
                 </a:solidFill>
-                <a:latin typeface="paybooc OTF" pitchFamily="34" charset="0"/>
-                <a:ea typeface="paybooc OTF" pitchFamily="34" charset="-122"/>
-                <a:cs typeface="paybooc OTF" pitchFamily="34" charset="-120"/>
+                <a:latin typeface="Pretendard Light" pitchFamily="34" charset="0"/>
+                <a:ea typeface="Pretendard Light" pitchFamily="34" charset="-122"/>
+                <a:cs typeface="Pretendard Light" pitchFamily="34" charset="-120"/>
               </a:rPr>
               <a:t>STEP 4</a:t>
             </a:r>
@@ -20994,9 +20994,9 @@
                 <a:solidFill>
                   <a:srgbClr val="777169"/>
                 </a:solidFill>
-                <a:latin typeface="paybooc OTF" pitchFamily="34" charset="0"/>
-                <a:ea typeface="paybooc OTF" pitchFamily="34" charset="-122"/>
-                <a:cs typeface="paybooc OTF" pitchFamily="34" charset="-120"/>
+                <a:latin typeface="Pretendard Light" pitchFamily="34" charset="0"/>
+                <a:ea typeface="Pretendard Light" pitchFamily="34" charset="-122"/>
+                <a:cs typeface="Pretendard Light" pitchFamily="34" charset="-120"/>
               </a:rPr>
               <a:t>왜 순서인가</a:t>
             </a:r>
@@ -21268,9 +21268,9 @@
                 <a:solidFill>
                   <a:srgbClr val="0C0A09"/>
                 </a:solidFill>
-                <a:latin typeface="paybooc OTF" pitchFamily="34" charset="0"/>
-                <a:ea typeface="paybooc OTF" pitchFamily="34" charset="-122"/>
-                <a:cs typeface="paybooc OTF" pitchFamily="34" charset="-120"/>
+                <a:latin typeface="Pretendard Light" pitchFamily="34" charset="0"/>
+                <a:ea typeface="Pretendard Light" pitchFamily="34" charset="-122"/>
+                <a:cs typeface="Pretendard Light" pitchFamily="34" charset="-120"/>
               </a:rPr>
               <a:t>수수 사주교육</a:t>
             </a:r>
@@ -21306,9 +21306,9 @@
                 <a:solidFill>
                   <a:srgbClr val="777169"/>
                 </a:solidFill>
-                <a:latin typeface="paybooc OTF" pitchFamily="34" charset="0"/>
-                <a:ea typeface="paybooc OTF" pitchFamily="34" charset="-122"/>
-                <a:cs typeface="paybooc OTF" pitchFamily="34" charset="-120"/>
+                <a:latin typeface="Pretendard Light" pitchFamily="34" charset="0"/>
+                <a:ea typeface="Pretendard Light" pitchFamily="34" charset="-122"/>
+                <a:cs typeface="Pretendard Light" pitchFamily="34" charset="-120"/>
               </a:rPr>
               <a:t>STEP 01</a:t>
             </a:r>
@@ -21344,9 +21344,9 @@
                 <a:solidFill>
                   <a:srgbClr val="777169"/>
                 </a:solidFill>
-                <a:latin typeface="paybooc OTF" pitchFamily="34" charset="0"/>
-                <a:ea typeface="paybooc OTF" pitchFamily="34" charset="-122"/>
-                <a:cs typeface="paybooc OTF" pitchFamily="34" charset="-120"/>
+                <a:latin typeface="Pretendard Light" pitchFamily="34" charset="0"/>
+                <a:ea typeface="Pretendard Light" pitchFamily="34" charset="-122"/>
+                <a:cs typeface="Pretendard Light" pitchFamily="34" charset="-120"/>
               </a:rPr>
               <a:t>STEP 01</a:t>
             </a:r>
@@ -21420,9 +21420,9 @@
                 <a:solidFill>
                   <a:srgbClr val="A8A29E"/>
                 </a:solidFill>
-                <a:latin typeface="paybooc OTF" pitchFamily="34" charset="0"/>
-                <a:ea typeface="paybooc OTF" pitchFamily="34" charset="-122"/>
-                <a:cs typeface="paybooc OTF" pitchFamily="34" charset="-120"/>
+                <a:latin typeface="Pretendard Light" pitchFamily="34" charset="0"/>
+                <a:ea typeface="Pretendard Light" pitchFamily="34" charset="-122"/>
+                <a:cs typeface="Pretendard Light" pitchFamily="34" charset="-120"/>
               </a:rPr>
               <a:t>THE SELF &amp; THE SEASON</a:t>
             </a:r>
@@ -21675,9 +21675,9 @@
                 <a:solidFill>
                   <a:srgbClr val="0C0A09"/>
                 </a:solidFill>
-                <a:latin typeface="paybooc OTF" pitchFamily="34" charset="0"/>
-                <a:ea typeface="paybooc OTF" pitchFamily="34" charset="-122"/>
-                <a:cs typeface="paybooc OTF" pitchFamily="34" charset="-120"/>
+                <a:latin typeface="Pretendard Light" pitchFamily="34" charset="0"/>
+                <a:ea typeface="Pretendard Light" pitchFamily="34" charset="-122"/>
+                <a:cs typeface="Pretendard Light" pitchFamily="34" charset="-120"/>
               </a:rPr>
               <a:t>수수 사주교육</a:t>
             </a:r>
@@ -21713,9 +21713,9 @@
                 <a:solidFill>
                   <a:srgbClr val="777169"/>
                 </a:solidFill>
-                <a:latin typeface="paybooc OTF" pitchFamily="34" charset="0"/>
-                <a:ea typeface="paybooc OTF" pitchFamily="34" charset="-122"/>
-                <a:cs typeface="paybooc OTF" pitchFamily="34" charset="-120"/>
+                <a:latin typeface="Pretendard Light" pitchFamily="34" charset="0"/>
+                <a:ea typeface="Pretendard Light" pitchFamily="34" charset="-122"/>
+                <a:cs typeface="Pretendard Light" pitchFamily="34" charset="-120"/>
               </a:rPr>
               <a:t>STEP 1</a:t>
             </a:r>
@@ -21751,9 +21751,9 @@
                 <a:solidFill>
                   <a:srgbClr val="777169"/>
                 </a:solidFill>
-                <a:latin typeface="paybooc OTF" pitchFamily="34" charset="0"/>
-                <a:ea typeface="paybooc OTF" pitchFamily="34" charset="-122"/>
-                <a:cs typeface="paybooc OTF" pitchFamily="34" charset="-120"/>
+                <a:latin typeface="Pretendard Light" pitchFamily="34" charset="0"/>
+                <a:ea typeface="Pretendard Light" pitchFamily="34" charset="-122"/>
+                <a:cs typeface="Pretendard Light" pitchFamily="34" charset="-120"/>
               </a:rPr>
               <a:t>STEP 1 · 일간과 월지</a:t>
             </a:r>
@@ -21827,9 +21827,9 @@
                 <a:solidFill>
                   <a:srgbClr val="777169"/>
                 </a:solidFill>
-                <a:latin typeface="paybooc OTF" pitchFamily="34" charset="0"/>
-                <a:ea typeface="paybooc OTF" pitchFamily="34" charset="-122"/>
-                <a:cs typeface="paybooc OTF" pitchFamily="34" charset="-120"/>
+                <a:latin typeface="Pretendard Light" pitchFamily="34" charset="0"/>
+                <a:ea typeface="Pretendard Light" pitchFamily="34" charset="-122"/>
+                <a:cs typeface="Pretendard Light" pitchFamily="34" charset="-120"/>
               </a:rPr>
               <a:t>사주의 주인공, 태어난 날의 천간</a:t>
             </a:r>
@@ -21899,9 +21899,9 @@
                 <a:solidFill>
                   <a:srgbClr val="777169"/>
                 </a:solidFill>
-                <a:latin typeface="paybooc OTF" pitchFamily="34" charset="0"/>
-                <a:ea typeface="paybooc OTF" pitchFamily="34" charset="-122"/>
-                <a:cs typeface="paybooc OTF" pitchFamily="34" charset="-120"/>
+                <a:latin typeface="Pretendard Light" pitchFamily="34" charset="0"/>
+                <a:ea typeface="Pretendard Light" pitchFamily="34" charset="-122"/>
+                <a:cs typeface="Pretendard Light" pitchFamily="34" charset="-120"/>
               </a:rPr>
               <a:t>WHO</a:t>
             </a:r>
@@ -21937,9 +21937,9 @@
                 <a:solidFill>
                   <a:srgbClr val="0C0A09"/>
                 </a:solidFill>
-                <a:latin typeface="paybooc OTF" pitchFamily="34" charset="0"/>
-                <a:ea typeface="paybooc OTF" pitchFamily="34" charset="-122"/>
-                <a:cs typeface="paybooc OTF" pitchFamily="34" charset="-120"/>
+                <a:latin typeface="Pretendard Light" pitchFamily="34" charset="0"/>
+                <a:ea typeface="Pretendard Light" pitchFamily="34" charset="-122"/>
+                <a:cs typeface="Pretendard Light" pitchFamily="34" charset="-120"/>
               </a:rPr>
               <a:t>일간 = 나</a:t>
             </a:r>
@@ -22050,9 +22050,9 @@
                 <a:solidFill>
                   <a:srgbClr val="777169"/>
                 </a:solidFill>
-                <a:latin typeface="paybooc OTF" pitchFamily="34" charset="0"/>
-                <a:ea typeface="paybooc OTF" pitchFamily="34" charset="-122"/>
-                <a:cs typeface="paybooc OTF" pitchFamily="34" charset="-120"/>
+                <a:latin typeface="Pretendard Light" pitchFamily="34" charset="0"/>
+                <a:ea typeface="Pretendard Light" pitchFamily="34" charset="-122"/>
+                <a:cs typeface="Pretendard Light" pitchFamily="34" charset="-120"/>
               </a:rPr>
               <a:t>10천간</a:t>
             </a:r>
@@ -22088,9 +22088,9 @@
                 <a:solidFill>
                   <a:srgbClr val="0C0A09"/>
                 </a:solidFill>
-                <a:latin typeface="paybooc OTF" pitchFamily="34" charset="0"/>
-                <a:ea typeface="paybooc OTF" pitchFamily="34" charset="-122"/>
-                <a:cs typeface="paybooc OTF" pitchFamily="34" charset="-120"/>
+                <a:latin typeface="Pretendard Light" pitchFamily="34" charset="0"/>
+                <a:ea typeface="Pretendard Light" pitchFamily="34" charset="-122"/>
+                <a:cs typeface="Pretendard Light" pitchFamily="34" charset="-120"/>
               </a:rPr>
               <a:t>열 개의 성향</a:t>
             </a:r>
@@ -22201,9 +22201,9 @@
                 <a:solidFill>
                   <a:srgbClr val="777169"/>
                 </a:solidFill>
-                <a:latin typeface="paybooc OTF" pitchFamily="34" charset="0"/>
-                <a:ea typeface="paybooc OTF" pitchFamily="34" charset="-122"/>
-                <a:cs typeface="paybooc OTF" pitchFamily="34" charset="-120"/>
+                <a:latin typeface="Pretendard Light" pitchFamily="34" charset="0"/>
+                <a:ea typeface="Pretendard Light" pitchFamily="34" charset="-122"/>
+                <a:cs typeface="Pretendard Light" pitchFamily="34" charset="-120"/>
               </a:rPr>
               <a:t>기준점</a:t>
             </a:r>
@@ -22239,9 +22239,9 @@
                 <a:solidFill>
                   <a:srgbClr val="0C0A09"/>
                 </a:solidFill>
-                <a:latin typeface="paybooc OTF" pitchFamily="34" charset="0"/>
-                <a:ea typeface="paybooc OTF" pitchFamily="34" charset="-122"/>
-                <a:cs typeface="paybooc OTF" pitchFamily="34" charset="-120"/>
+                <a:latin typeface="Pretendard Light" pitchFamily="34" charset="0"/>
+                <a:ea typeface="Pretendard Light" pitchFamily="34" charset="-122"/>
+                <a:cs typeface="Pretendard Light" pitchFamily="34" charset="-120"/>
               </a:rPr>
               <a:t>모든 해석의 축</a:t>
             </a:r>
@@ -22352,9 +22352,9 @@
                 <a:solidFill>
                   <a:srgbClr val="777169"/>
                 </a:solidFill>
-                <a:latin typeface="paybooc OTF" pitchFamily="34" charset="0"/>
-                <a:ea typeface="paybooc OTF" pitchFamily="34" charset="-122"/>
-                <a:cs typeface="paybooc OTF" pitchFamily="34" charset="-120"/>
+                <a:latin typeface="Pretendard Light" pitchFamily="34" charset="0"/>
+                <a:ea typeface="Pretendard Light" pitchFamily="34" charset="-122"/>
+                <a:cs typeface="Pretendard Light" pitchFamily="34" charset="-120"/>
               </a:rPr>
               <a:t>STEP 1-a</a:t>
             </a:r>
@@ -22585,9 +22585,9 @@
                 <a:solidFill>
                   <a:srgbClr val="0C0A09"/>
                 </a:solidFill>
-                <a:latin typeface="paybooc OTF" pitchFamily="34" charset="0"/>
-                <a:ea typeface="paybooc OTF" pitchFamily="34" charset="-122"/>
-                <a:cs typeface="paybooc OTF" pitchFamily="34" charset="-120"/>
+                <a:latin typeface="Pretendard Light" pitchFamily="34" charset="0"/>
+                <a:ea typeface="Pretendard Light" pitchFamily="34" charset="-122"/>
+                <a:cs typeface="Pretendard Light" pitchFamily="34" charset="-120"/>
               </a:rPr>
               <a:t>수수 사주교육</a:t>
             </a:r>
@@ -22623,9 +22623,9 @@
                 <a:solidFill>
                   <a:srgbClr val="777169"/>
                 </a:solidFill>
-                <a:latin typeface="paybooc OTF" pitchFamily="34" charset="0"/>
-                <a:ea typeface="paybooc OTF" pitchFamily="34" charset="-122"/>
-                <a:cs typeface="paybooc OTF" pitchFamily="34" charset="-120"/>
+                <a:latin typeface="Pretendard Light" pitchFamily="34" charset="0"/>
+                <a:ea typeface="Pretendard Light" pitchFamily="34" charset="-122"/>
+                <a:cs typeface="Pretendard Light" pitchFamily="34" charset="-120"/>
               </a:rPr>
               <a:t>STEP 1</a:t>
             </a:r>
@@ -22661,9 +22661,9 @@
                 <a:solidFill>
                   <a:srgbClr val="777169"/>
                 </a:solidFill>
-                <a:latin typeface="paybooc OTF" pitchFamily="34" charset="0"/>
-                <a:ea typeface="paybooc OTF" pitchFamily="34" charset="-122"/>
-                <a:cs typeface="paybooc OTF" pitchFamily="34" charset="-120"/>
+                <a:latin typeface="Pretendard Light" pitchFamily="34" charset="0"/>
+                <a:ea typeface="Pretendard Light" pitchFamily="34" charset="-122"/>
+                <a:cs typeface="Pretendard Light" pitchFamily="34" charset="-120"/>
               </a:rPr>
               <a:t>STEP 1 · 일간과 월지</a:t>
             </a:r>
@@ -22737,9 +22737,9 @@
                 <a:solidFill>
                   <a:srgbClr val="777169"/>
                 </a:solidFill>
-                <a:latin typeface="paybooc OTF" pitchFamily="34" charset="0"/>
-                <a:ea typeface="paybooc OTF" pitchFamily="34" charset="-122"/>
-                <a:cs typeface="paybooc OTF" pitchFamily="34" charset="-120"/>
+                <a:latin typeface="Pretendard Light" pitchFamily="34" charset="0"/>
+                <a:ea typeface="Pretendard Light" pitchFamily="34" charset="-122"/>
+                <a:cs typeface="Pretendard Light" pitchFamily="34" charset="-120"/>
               </a:rPr>
               <a:t>조후와 격국의 뿌리</a:t>
             </a:r>
@@ -22809,9 +22809,9 @@
                 <a:solidFill>
                   <a:srgbClr val="777169"/>
                 </a:solidFill>
-                <a:latin typeface="paybooc OTF" pitchFamily="34" charset="0"/>
-                <a:ea typeface="paybooc OTF" pitchFamily="34" charset="-122"/>
-                <a:cs typeface="paybooc OTF" pitchFamily="34" charset="-120"/>
+                <a:latin typeface="Pretendard Light" pitchFamily="34" charset="0"/>
+                <a:ea typeface="Pretendard Light" pitchFamily="34" charset="-122"/>
+                <a:cs typeface="Pretendard Light" pitchFamily="34" charset="-120"/>
               </a:rPr>
               <a:t>가장 힘센 자리</a:t>
             </a:r>
@@ -22847,9 +22847,9 @@
                 <a:solidFill>
                   <a:srgbClr val="0C0A09"/>
                 </a:solidFill>
-                <a:latin typeface="paybooc OTF" pitchFamily="34" charset="0"/>
-                <a:ea typeface="paybooc OTF" pitchFamily="34" charset="-122"/>
-                <a:cs typeface="paybooc OTF" pitchFamily="34" charset="-120"/>
+                <a:latin typeface="Pretendard Light" pitchFamily="34" charset="0"/>
+                <a:ea typeface="Pretendard Light" pitchFamily="34" charset="-122"/>
+                <a:cs typeface="Pretendard Light" pitchFamily="34" charset="-120"/>
               </a:rPr>
               <a:t>계절의 지배</a:t>
             </a:r>
@@ -22960,9 +22960,9 @@
                 <a:solidFill>
                   <a:srgbClr val="777169"/>
                 </a:solidFill>
-                <a:latin typeface="paybooc OTF" pitchFamily="34" charset="0"/>
-                <a:ea typeface="paybooc OTF" pitchFamily="34" charset="-122"/>
-                <a:cs typeface="paybooc OTF" pitchFamily="34" charset="-120"/>
+                <a:latin typeface="Pretendard Light" pitchFamily="34" charset="0"/>
+                <a:ea typeface="Pretendard Light" pitchFamily="34" charset="-122"/>
+                <a:cs typeface="Pretendard Light" pitchFamily="34" charset="-120"/>
               </a:rPr>
               <a:t>조후 調候</a:t>
             </a:r>
@@ -22998,9 +22998,9 @@
                 <a:solidFill>
                   <a:srgbClr val="0C0A09"/>
                 </a:solidFill>
-                <a:latin typeface="paybooc OTF" pitchFamily="34" charset="0"/>
-                <a:ea typeface="paybooc OTF" pitchFamily="34" charset="-122"/>
-                <a:cs typeface="paybooc OTF" pitchFamily="34" charset="-120"/>
+                <a:latin typeface="Pretendard Light" pitchFamily="34" charset="0"/>
+                <a:ea typeface="Pretendard Light" pitchFamily="34" charset="-122"/>
+                <a:cs typeface="Pretendard Light" pitchFamily="34" charset="-120"/>
               </a:rPr>
               <a:t>춥고 더움</a:t>
             </a:r>
@@ -23111,9 +23111,9 @@
                 <a:solidFill>
                   <a:srgbClr val="777169"/>
                 </a:solidFill>
-                <a:latin typeface="paybooc OTF" pitchFamily="34" charset="0"/>
-                <a:ea typeface="paybooc OTF" pitchFamily="34" charset="-122"/>
-                <a:cs typeface="paybooc OTF" pitchFamily="34" charset="-120"/>
+                <a:latin typeface="Pretendard Light" pitchFamily="34" charset="0"/>
+                <a:ea typeface="Pretendard Light" pitchFamily="34" charset="-122"/>
+                <a:cs typeface="Pretendard Light" pitchFamily="34" charset="-120"/>
               </a:rPr>
               <a:t>격국 格局</a:t>
             </a:r>
@@ -23149,9 +23149,9 @@
                 <a:solidFill>
                   <a:srgbClr val="0C0A09"/>
                 </a:solidFill>
-                <a:latin typeface="paybooc OTF" pitchFamily="34" charset="0"/>
-                <a:ea typeface="paybooc OTF" pitchFamily="34" charset="-122"/>
-                <a:cs typeface="paybooc OTF" pitchFamily="34" charset="-120"/>
+                <a:latin typeface="Pretendard Light" pitchFamily="34" charset="0"/>
+                <a:ea typeface="Pretendard Light" pitchFamily="34" charset="-122"/>
+                <a:cs typeface="Pretendard Light" pitchFamily="34" charset="-120"/>
               </a:rPr>
               <a:t>그릇의 골격</a:t>
             </a:r>
@@ -23262,9 +23262,9 @@
                 <a:solidFill>
                   <a:srgbClr val="777169"/>
                 </a:solidFill>
-                <a:latin typeface="paybooc OTF" pitchFamily="34" charset="0"/>
-                <a:ea typeface="paybooc OTF" pitchFamily="34" charset="-122"/>
-                <a:cs typeface="paybooc OTF" pitchFamily="34" charset="-120"/>
+                <a:latin typeface="Pretendard Light" pitchFamily="34" charset="0"/>
+                <a:ea typeface="Pretendard Light" pitchFamily="34" charset="-122"/>
+                <a:cs typeface="Pretendard Light" pitchFamily="34" charset="-120"/>
               </a:rPr>
               <a:t>STEP 1-b</a:t>
             </a:r>
@@ -23495,9 +23495,9 @@
                 <a:solidFill>
                   <a:srgbClr val="0C0A09"/>
                 </a:solidFill>
-                <a:latin typeface="paybooc OTF" pitchFamily="34" charset="0"/>
-                <a:ea typeface="paybooc OTF" pitchFamily="34" charset="-122"/>
-                <a:cs typeface="paybooc OTF" pitchFamily="34" charset="-120"/>
+                <a:latin typeface="Pretendard Light" pitchFamily="34" charset="0"/>
+                <a:ea typeface="Pretendard Light" pitchFamily="34" charset="-122"/>
+                <a:cs typeface="Pretendard Light" pitchFamily="34" charset="-120"/>
               </a:rPr>
               <a:t>수수 사주교육</a:t>
             </a:r>
@@ -23533,9 +23533,9 @@
                 <a:solidFill>
                   <a:srgbClr val="777169"/>
                 </a:solidFill>
-                <a:latin typeface="paybooc OTF" pitchFamily="34" charset="0"/>
-                <a:ea typeface="paybooc OTF" pitchFamily="34" charset="-122"/>
-                <a:cs typeface="paybooc OTF" pitchFamily="34" charset="-120"/>
+                <a:latin typeface="Pretendard Light" pitchFamily="34" charset="0"/>
+                <a:ea typeface="Pretendard Light" pitchFamily="34" charset="-122"/>
+                <a:cs typeface="Pretendard Light" pitchFamily="34" charset="-120"/>
               </a:rPr>
               <a:t>STEP 1</a:t>
             </a:r>
@@ -23571,9 +23571,9 @@
                 <a:solidFill>
                   <a:srgbClr val="777169"/>
                 </a:solidFill>
-                <a:latin typeface="paybooc OTF" pitchFamily="34" charset="0"/>
-                <a:ea typeface="paybooc OTF" pitchFamily="34" charset="-122"/>
-                <a:cs typeface="paybooc OTF" pitchFamily="34" charset="-120"/>
+                <a:latin typeface="Pretendard Light" pitchFamily="34" charset="0"/>
+                <a:ea typeface="Pretendard Light" pitchFamily="34" charset="-122"/>
+                <a:cs typeface="Pretendard Light" pitchFamily="34" charset="-120"/>
               </a:rPr>
               <a:t>STEP 1 · 일간과 월지</a:t>
             </a:r>
@@ -23647,9 +23647,9 @@
                 <a:solidFill>
                   <a:srgbClr val="777169"/>
                 </a:solidFill>
-                <a:latin typeface="paybooc OTF" pitchFamily="34" charset="0"/>
-                <a:ea typeface="paybooc OTF" pitchFamily="34" charset="-122"/>
-                <a:cs typeface="paybooc OTF" pitchFamily="34" charset="-120"/>
+                <a:latin typeface="Pretendard Light" pitchFamily="34" charset="0"/>
+                <a:ea typeface="Pretendard Light" pitchFamily="34" charset="-122"/>
+                <a:cs typeface="Pretendard Light" pitchFamily="34" charset="-120"/>
               </a:rPr>
               <a:t>추우면 데우고, 더우면 식힌다</a:t>
             </a:r>
@@ -23719,9 +23719,9 @@
                 <a:solidFill>
                   <a:srgbClr val="777169"/>
                 </a:solidFill>
-                <a:latin typeface="paybooc OTF" pitchFamily="34" charset="0"/>
-                <a:ea typeface="paybooc OTF" pitchFamily="34" charset="-122"/>
-                <a:cs typeface="paybooc OTF" pitchFamily="34" charset="-120"/>
+                <a:latin typeface="Pretendard Light" pitchFamily="34" charset="0"/>
+                <a:ea typeface="Pretendard Light" pitchFamily="34" charset="-122"/>
+                <a:cs typeface="Pretendard Light" pitchFamily="34" charset="-120"/>
               </a:rPr>
               <a:t>계절</a:t>
             </a:r>
@@ -23836,9 +23836,9 @@
                 <a:solidFill>
                   <a:srgbClr val="A8A29E"/>
                 </a:solidFill>
-                <a:latin typeface="paybooc OTF" pitchFamily="34" charset="0"/>
-                <a:ea typeface="paybooc OTF" pitchFamily="34" charset="-122"/>
-                <a:cs typeface="paybooc OTF" pitchFamily="34" charset="-120"/>
+                <a:latin typeface="Pretendard Light" pitchFamily="34" charset="0"/>
+                <a:ea typeface="Pretendard Light" pitchFamily="34" charset="-122"/>
+                <a:cs typeface="Pretendard Light" pitchFamily="34" charset="-120"/>
               </a:rPr>
               <a:t>→</a:t>
             </a:r>
@@ -23908,9 +23908,9 @@
                 <a:solidFill>
                   <a:srgbClr val="777169"/>
                 </a:solidFill>
-                <a:latin typeface="paybooc OTF" pitchFamily="34" charset="0"/>
-                <a:ea typeface="paybooc OTF" pitchFamily="34" charset="-122"/>
-                <a:cs typeface="paybooc OTF" pitchFamily="34" charset="-120"/>
+                <a:latin typeface="Pretendard Light" pitchFamily="34" charset="0"/>
+                <a:ea typeface="Pretendard Light" pitchFamily="34" charset="-122"/>
+                <a:cs typeface="Pretendard Light" pitchFamily="34" charset="-120"/>
               </a:rPr>
               <a:t>일간</a:t>
             </a:r>
@@ -24025,9 +24025,9 @@
                 <a:solidFill>
                   <a:srgbClr val="A8A29E"/>
                 </a:solidFill>
-                <a:latin typeface="paybooc OTF" pitchFamily="34" charset="0"/>
-                <a:ea typeface="paybooc OTF" pitchFamily="34" charset="-122"/>
-                <a:cs typeface="paybooc OTF" pitchFamily="34" charset="-120"/>
+                <a:latin typeface="Pretendard Light" pitchFamily="34" charset="0"/>
+                <a:ea typeface="Pretendard Light" pitchFamily="34" charset="-122"/>
+                <a:cs typeface="Pretendard Light" pitchFamily="34" charset="-120"/>
               </a:rPr>
               <a:t>→</a:t>
             </a:r>
@@ -24097,9 +24097,9 @@
                 <a:solidFill>
                   <a:srgbClr val="777169"/>
                 </a:solidFill>
-                <a:latin typeface="paybooc OTF" pitchFamily="34" charset="0"/>
-                <a:ea typeface="paybooc OTF" pitchFamily="34" charset="-122"/>
-                <a:cs typeface="paybooc OTF" pitchFamily="34" charset="-120"/>
+                <a:latin typeface="Pretendard Light" pitchFamily="34" charset="0"/>
+                <a:ea typeface="Pretendard Light" pitchFamily="34" charset="-122"/>
+                <a:cs typeface="Pretendard Light" pitchFamily="34" charset="-120"/>
               </a:rPr>
               <a:t>필요</a:t>
             </a:r>
@@ -24248,9 +24248,9 @@
                 <a:solidFill>
                   <a:srgbClr val="777169"/>
                 </a:solidFill>
-                <a:latin typeface="paybooc OTF" pitchFamily="34" charset="0"/>
-                <a:ea typeface="paybooc OTF" pitchFamily="34" charset="-122"/>
-                <a:cs typeface="paybooc OTF" pitchFamily="34" charset="-120"/>
+                <a:latin typeface="Pretendard Light" pitchFamily="34" charset="0"/>
+                <a:ea typeface="Pretendard Light" pitchFamily="34" charset="-122"/>
+                <a:cs typeface="Pretendard Light" pitchFamily="34" charset="-120"/>
               </a:rPr>
               <a:t>조후란</a:t>
             </a:r>
